--- a/output/korea_discount_slides_korean.pptx
+++ b/output/korea_discount_slides_korean.pptx
@@ -4,6 +4,9 @@
   <p:sldMasterIdLst>
     <p:sldMasterId id="2147483648" r:id="rId1"/>
   </p:sldMasterIdLst>
+  <p:notesMasterIdLst>
+    <p:notesMasterId r:id="rId11"/>
+  </p:notesMasterIdLst>
   <p:sldIdLst>
     <p:sldId id="256" r:id="rId2"/>
     <p:sldId id="257" r:id="rId3"/>
@@ -129,6 +132,518 @@
     </p:ext>
   </p:extLst>
 </p:presentation>
+</file>
+
+<file path=ppt/notesMasters/notesMaster1.xml><?xml version="1.0" encoding="utf-8"?>
+<p:notesMaster xmlns:a="http://schemas.openxmlformats.org/drawingml/2006/main" xmlns:r="http://schemas.openxmlformats.org/officeDocument/2006/relationships" xmlns:p="http://schemas.openxmlformats.org/presentationml/2006/main">
+  <p:cSld>
+    <p:bg>
+      <p:bgRef idx="1001">
+        <a:schemeClr val="bg1"/>
+      </p:bgRef>
+    </p:bg>
+    <p:spTree>
+      <p:nvGrpSpPr>
+        <p:cNvPr id="1" name=""/>
+        <p:cNvGrpSpPr/>
+        <p:nvPr/>
+      </p:nvGrpSpPr>
+      <p:grpSpPr>
+        <a:xfrm>
+          <a:off x="0" y="0"/>
+          <a:ext cx="0" cy="0"/>
+          <a:chOff x="0" y="0"/>
+          <a:chExt cx="0" cy="0"/>
+        </a:xfrm>
+      </p:grpSpPr>
+      <p:sp>
+        <p:nvSpPr>
+          <p:cNvPr id="2" name="Header Placeholder 1"/>
+          <p:cNvSpPr>
+            <a:spLocks noGrp="1"/>
+          </p:cNvSpPr>
+          <p:nvPr>
+            <p:ph type="hdr" sz="quarter"/>
+          </p:nvPr>
+        </p:nvSpPr>
+        <p:spPr>
+          <a:xfrm>
+            <a:off x="0" y="0"/>
+            <a:ext cx="2971800" cy="458788"/>
+          </a:xfrm>
+          <a:prstGeom prst="rect">
+            <a:avLst/>
+          </a:prstGeom>
+        </p:spPr>
+        <p:txBody>
+          <a:bodyPr vert="horz" lIns="91440" tIns="45720" rIns="91440" bIns="45720" rtlCol="0"/>
+          <a:lstStyle>
+            <a:lvl1pPr algn="l">
+              <a:defRPr sz="1200"/>
+            </a:lvl1pPr>
+          </a:lstStyle>
+          <a:p>
+            <a:endParaRPr lang="en-US"/>
+          </a:p>
+        </p:txBody>
+      </p:sp>
+      <p:sp>
+        <p:nvSpPr>
+          <p:cNvPr id="3" name="Date Placeholder 2"/>
+          <p:cNvSpPr>
+            <a:spLocks noGrp="1"/>
+          </p:cNvSpPr>
+          <p:nvPr>
+            <p:ph type="dt" idx="1"/>
+          </p:nvPr>
+        </p:nvSpPr>
+        <p:spPr>
+          <a:xfrm>
+            <a:off x="3884613" y="0"/>
+            <a:ext cx="2971800" cy="458788"/>
+          </a:xfrm>
+          <a:prstGeom prst="rect">
+            <a:avLst/>
+          </a:prstGeom>
+        </p:spPr>
+        <p:txBody>
+          <a:bodyPr vert="horz" lIns="91440" tIns="45720" rIns="91440" bIns="45720" rtlCol="0"/>
+          <a:lstStyle>
+            <a:lvl1pPr algn="r">
+              <a:defRPr sz="1200"/>
+            </a:lvl1pPr>
+          </a:lstStyle>
+          <a:p>
+            <a:fld id="{D62E4043-30CA-DF46-8954-844AEB832A01}" type="datetimeFigureOut">
+              <a:rPr lang="en-US" smtClean="0"/>
+              <a:t>4/21/26</a:t>
+            </a:fld>
+            <a:endParaRPr lang="en-US"/>
+          </a:p>
+        </p:txBody>
+      </p:sp>
+      <p:sp>
+        <p:nvSpPr>
+          <p:cNvPr id="4" name="Slide Image Placeholder 3"/>
+          <p:cNvSpPr>
+            <a:spLocks noGrp="1" noRot="1" noChangeAspect="1"/>
+          </p:cNvSpPr>
+          <p:nvPr>
+            <p:ph type="sldImg" idx="2"/>
+          </p:nvPr>
+        </p:nvSpPr>
+        <p:spPr>
+          <a:xfrm>
+            <a:off x="685800" y="1143000"/>
+            <a:ext cx="5486400" cy="3086100"/>
+          </a:xfrm>
+          <a:prstGeom prst="rect">
+            <a:avLst/>
+          </a:prstGeom>
+          <a:noFill/>
+          <a:ln w="12700">
+            <a:solidFill>
+              <a:prstClr val="black"/>
+            </a:solidFill>
+          </a:ln>
+        </p:spPr>
+        <p:txBody>
+          <a:bodyPr vert="horz" lIns="91440" tIns="45720" rIns="91440" bIns="45720" rtlCol="0" anchor="ctr"/>
+          <a:lstStyle/>
+          <a:p>
+            <a:endParaRPr lang="en-US"/>
+          </a:p>
+        </p:txBody>
+      </p:sp>
+      <p:sp>
+        <p:nvSpPr>
+          <p:cNvPr id="5" name="Notes Placeholder 4"/>
+          <p:cNvSpPr>
+            <a:spLocks noGrp="1"/>
+          </p:cNvSpPr>
+          <p:nvPr>
+            <p:ph type="body" sz="quarter" idx="3"/>
+          </p:nvPr>
+        </p:nvSpPr>
+        <p:spPr>
+          <a:xfrm>
+            <a:off x="685800" y="4400550"/>
+            <a:ext cx="5486400" cy="3600450"/>
+          </a:xfrm>
+          <a:prstGeom prst="rect">
+            <a:avLst/>
+          </a:prstGeom>
+        </p:spPr>
+        <p:txBody>
+          <a:bodyPr vert="horz" lIns="91440" tIns="45720" rIns="91440" bIns="45720" rtlCol="0"/>
+          <a:lstStyle/>
+          <a:p>
+            <a:pPr lvl="0"/>
+            <a:r>
+              <a:rPr lang="en-US"/>
+              <a:t>Click to edit Master text styles</a:t>
+            </a:r>
+          </a:p>
+          <a:p>
+            <a:pPr lvl="1"/>
+            <a:r>
+              <a:rPr lang="en-US"/>
+              <a:t>Second level</a:t>
+            </a:r>
+          </a:p>
+          <a:p>
+            <a:pPr lvl="2"/>
+            <a:r>
+              <a:rPr lang="en-US"/>
+              <a:t>Third level</a:t>
+            </a:r>
+          </a:p>
+          <a:p>
+            <a:pPr lvl="3"/>
+            <a:r>
+              <a:rPr lang="en-US"/>
+              <a:t>Fourth level</a:t>
+            </a:r>
+          </a:p>
+          <a:p>
+            <a:pPr lvl="4"/>
+            <a:r>
+              <a:rPr lang="en-US"/>
+              <a:t>Fifth level</a:t>
+            </a:r>
+          </a:p>
+        </p:txBody>
+      </p:sp>
+      <p:sp>
+        <p:nvSpPr>
+          <p:cNvPr id="6" name="Footer Placeholder 5"/>
+          <p:cNvSpPr>
+            <a:spLocks noGrp="1"/>
+          </p:cNvSpPr>
+          <p:nvPr>
+            <p:ph type="ftr" sz="quarter" idx="4"/>
+          </p:nvPr>
+        </p:nvSpPr>
+        <p:spPr>
+          <a:xfrm>
+            <a:off x="0" y="8685213"/>
+            <a:ext cx="2971800" cy="458787"/>
+          </a:xfrm>
+          <a:prstGeom prst="rect">
+            <a:avLst/>
+          </a:prstGeom>
+        </p:spPr>
+        <p:txBody>
+          <a:bodyPr vert="horz" lIns="91440" tIns="45720" rIns="91440" bIns="45720" rtlCol="0" anchor="b"/>
+          <a:lstStyle>
+            <a:lvl1pPr algn="l">
+              <a:defRPr sz="1200"/>
+            </a:lvl1pPr>
+          </a:lstStyle>
+          <a:p>
+            <a:endParaRPr lang="en-US"/>
+          </a:p>
+        </p:txBody>
+      </p:sp>
+      <p:sp>
+        <p:nvSpPr>
+          <p:cNvPr id="7" name="Slide Number Placeholder 6"/>
+          <p:cNvSpPr>
+            <a:spLocks noGrp="1"/>
+          </p:cNvSpPr>
+          <p:nvPr>
+            <p:ph type="sldNum" sz="quarter" idx="5"/>
+          </p:nvPr>
+        </p:nvSpPr>
+        <p:spPr>
+          <a:xfrm>
+            <a:off x="3884613" y="8685213"/>
+            <a:ext cx="2971800" cy="458787"/>
+          </a:xfrm>
+          <a:prstGeom prst="rect">
+            <a:avLst/>
+          </a:prstGeom>
+        </p:spPr>
+        <p:txBody>
+          <a:bodyPr vert="horz" lIns="91440" tIns="45720" rIns="91440" bIns="45720" rtlCol="0" anchor="b"/>
+          <a:lstStyle>
+            <a:lvl1pPr algn="r">
+              <a:defRPr sz="1200"/>
+            </a:lvl1pPr>
+          </a:lstStyle>
+          <a:p>
+            <a:fld id="{28C0214D-37E7-CF45-B364-3BB5BAE4A2BF}" type="slidenum">
+              <a:rPr lang="en-US" smtClean="0"/>
+              <a:t>‹#›</a:t>
+            </a:fld>
+            <a:endParaRPr lang="en-US"/>
+          </a:p>
+        </p:txBody>
+      </p:sp>
+    </p:spTree>
+    <p:extLst>
+      <p:ext uri="{BB962C8B-B14F-4D97-AF65-F5344CB8AC3E}">
+        <p14:creationId xmlns:p14="http://schemas.microsoft.com/office/powerpoint/2010/main" val="3434535745"/>
+      </p:ext>
+    </p:extLst>
+  </p:cSld>
+  <p:clrMap bg1="lt1" tx1="dk1" bg2="lt2" tx2="dk2" accent1="accent1" accent2="accent2" accent3="accent3" accent4="accent4" accent5="accent5" accent6="accent6" hlink="hlink" folHlink="folHlink"/>
+  <p:notesStyle>
+    <a:lvl1pPr marL="0" algn="l" defTabSz="914400" rtl="0" eaLnBrk="1" latinLnBrk="0" hangingPunct="1">
+      <a:defRPr sz="1200" kern="1200">
+        <a:solidFill>
+          <a:schemeClr val="tx1"/>
+        </a:solidFill>
+        <a:latin typeface="+mn-lt"/>
+        <a:ea typeface="+mn-ea"/>
+        <a:cs typeface="+mn-cs"/>
+      </a:defRPr>
+    </a:lvl1pPr>
+    <a:lvl2pPr marL="457200" algn="l" defTabSz="914400" rtl="0" eaLnBrk="1" latinLnBrk="0" hangingPunct="1">
+      <a:defRPr sz="1200" kern="1200">
+        <a:solidFill>
+          <a:schemeClr val="tx1"/>
+        </a:solidFill>
+        <a:latin typeface="+mn-lt"/>
+        <a:ea typeface="+mn-ea"/>
+        <a:cs typeface="+mn-cs"/>
+      </a:defRPr>
+    </a:lvl2pPr>
+    <a:lvl3pPr marL="914400" algn="l" defTabSz="914400" rtl="0" eaLnBrk="1" latinLnBrk="0" hangingPunct="1">
+      <a:defRPr sz="1200" kern="1200">
+        <a:solidFill>
+          <a:schemeClr val="tx1"/>
+        </a:solidFill>
+        <a:latin typeface="+mn-lt"/>
+        <a:ea typeface="+mn-ea"/>
+        <a:cs typeface="+mn-cs"/>
+      </a:defRPr>
+    </a:lvl3pPr>
+    <a:lvl4pPr marL="1371600" algn="l" defTabSz="914400" rtl="0" eaLnBrk="1" latinLnBrk="0" hangingPunct="1">
+      <a:defRPr sz="1200" kern="1200">
+        <a:solidFill>
+          <a:schemeClr val="tx1"/>
+        </a:solidFill>
+        <a:latin typeface="+mn-lt"/>
+        <a:ea typeface="+mn-ea"/>
+        <a:cs typeface="+mn-cs"/>
+      </a:defRPr>
+    </a:lvl4pPr>
+    <a:lvl5pPr marL="1828800" algn="l" defTabSz="914400" rtl="0" eaLnBrk="1" latinLnBrk="0" hangingPunct="1">
+      <a:defRPr sz="1200" kern="1200">
+        <a:solidFill>
+          <a:schemeClr val="tx1"/>
+        </a:solidFill>
+        <a:latin typeface="+mn-lt"/>
+        <a:ea typeface="+mn-ea"/>
+        <a:cs typeface="+mn-cs"/>
+      </a:defRPr>
+    </a:lvl5pPr>
+    <a:lvl6pPr marL="2286000" algn="l" defTabSz="914400" rtl="0" eaLnBrk="1" latinLnBrk="0" hangingPunct="1">
+      <a:defRPr sz="1200" kern="1200">
+        <a:solidFill>
+          <a:schemeClr val="tx1"/>
+        </a:solidFill>
+        <a:latin typeface="+mn-lt"/>
+        <a:ea typeface="+mn-ea"/>
+        <a:cs typeface="+mn-cs"/>
+      </a:defRPr>
+    </a:lvl6pPr>
+    <a:lvl7pPr marL="2743200" algn="l" defTabSz="914400" rtl="0" eaLnBrk="1" latinLnBrk="0" hangingPunct="1">
+      <a:defRPr sz="1200" kern="1200">
+        <a:solidFill>
+          <a:schemeClr val="tx1"/>
+        </a:solidFill>
+        <a:latin typeface="+mn-lt"/>
+        <a:ea typeface="+mn-ea"/>
+        <a:cs typeface="+mn-cs"/>
+      </a:defRPr>
+    </a:lvl7pPr>
+    <a:lvl8pPr marL="3200400" algn="l" defTabSz="914400" rtl="0" eaLnBrk="1" latinLnBrk="0" hangingPunct="1">
+      <a:defRPr sz="1200" kern="1200">
+        <a:solidFill>
+          <a:schemeClr val="tx1"/>
+        </a:solidFill>
+        <a:latin typeface="+mn-lt"/>
+        <a:ea typeface="+mn-ea"/>
+        <a:cs typeface="+mn-cs"/>
+      </a:defRPr>
+    </a:lvl8pPr>
+    <a:lvl9pPr marL="3657600" algn="l" defTabSz="914400" rtl="0" eaLnBrk="1" latinLnBrk="0" hangingPunct="1">
+      <a:defRPr sz="1200" kern="1200">
+        <a:solidFill>
+          <a:schemeClr val="tx1"/>
+        </a:solidFill>
+        <a:latin typeface="+mn-lt"/>
+        <a:ea typeface="+mn-ea"/>
+        <a:cs typeface="+mn-cs"/>
+      </a:defRPr>
+    </a:lvl9pPr>
+  </p:notesStyle>
+</p:notesMaster>
+</file>
+
+<file path=ppt/notesSlides/notesSlide1.xml><?xml version="1.0" encoding="utf-8"?>
+<p:notes xmlns:a="http://schemas.openxmlformats.org/drawingml/2006/main" xmlns:r="http://schemas.openxmlformats.org/officeDocument/2006/relationships" xmlns:p="http://schemas.openxmlformats.org/presentationml/2006/main">
+  <p:cSld>
+    <p:spTree>
+      <p:nvGrpSpPr>
+        <p:cNvPr id="1" name=""/>
+        <p:cNvGrpSpPr/>
+        <p:nvPr/>
+      </p:nvGrpSpPr>
+      <p:grpSpPr>
+        <a:xfrm>
+          <a:off x="0" y="0"/>
+          <a:ext cx="0" cy="0"/>
+          <a:chOff x="0" y="0"/>
+          <a:chExt cx="0" cy="0"/>
+        </a:xfrm>
+      </p:grpSpPr>
+      <p:sp>
+        <p:nvSpPr>
+          <p:cNvPr id="2" name="Slide Image Placeholder 1"/>
+          <p:cNvSpPr>
+            <a:spLocks noGrp="1" noRot="1" noChangeAspect="1"/>
+          </p:cNvSpPr>
+          <p:nvPr>
+            <p:ph type="sldImg"/>
+          </p:nvPr>
+        </p:nvSpPr>
+        <p:spPr/>
+      </p:sp>
+      <p:sp>
+        <p:nvSpPr>
+          <p:cNvPr id="3" name="Notes Placeholder 2"/>
+          <p:cNvSpPr>
+            <a:spLocks noGrp="1"/>
+          </p:cNvSpPr>
+          <p:nvPr>
+            <p:ph type="body" idx="1"/>
+          </p:nvPr>
+        </p:nvSpPr>
+        <p:spPr/>
+        <p:txBody>
+          <a:bodyPr/>
+          <a:lstStyle/>
+          <a:p>
+            <a:pPr marL="0" marR="0" lvl="0" indent="0" algn="l" defTabSz="914400" rtl="0" eaLnBrk="1" fontAlgn="auto" latinLnBrk="0" hangingPunct="1">
+              <a:lnSpc>
+                <a:spcPct val="100000"/>
+              </a:lnSpc>
+              <a:spcBef>
+                <a:spcPts val="0"/>
+              </a:spcBef>
+              <a:spcAft>
+                <a:spcPts val="0"/>
+              </a:spcAft>
+              <a:buClrTx/>
+              <a:buSzTx/>
+              <a:buFontTx/>
+              <a:buNone/>
+              <a:tabLst/>
+              <a:defRPr/>
+            </a:pPr>
+            <a:r>
+              <a:rPr lang="ko-KR" altLang="en-US" sz="1200" b="1" dirty="0">
+                <a:solidFill>
+                  <a:srgbClr val="000000"/>
+                </a:solidFill>
+                <a:latin typeface="맑은 고딕"/>
+              </a:rPr>
+              <a:t>주의사항</a:t>
+            </a:r>
+            <a:r>
+              <a:rPr lang="en-US" altLang="ko-KR" sz="1200" b="1" dirty="0">
+                <a:solidFill>
+                  <a:srgbClr val="000000"/>
+                </a:solidFill>
+                <a:latin typeface="맑은 고딕"/>
+              </a:rPr>
+              <a:t>:  </a:t>
+            </a:r>
+            <a:r>
+              <a:rPr lang="ko-KR" altLang="en-US" sz="1200" dirty="0">
+                <a:solidFill>
+                  <a:srgbClr val="000000"/>
+                </a:solidFill>
+                <a:latin typeface="맑은 고딕"/>
+              </a:rPr>
+              <a:t>국가 클러스터 </a:t>
+            </a:r>
+            <a:r>
+              <a:rPr lang="en-US" sz="1200" dirty="0">
+                <a:solidFill>
+                  <a:srgbClr val="000000"/>
+                </a:solidFill>
+                <a:latin typeface="맑은 고딕"/>
+              </a:rPr>
+              <a:t>N = 4; </a:t>
+            </a:r>
+            <a:r>
+              <a:rPr lang="ko-KR" altLang="en-US" sz="1200" dirty="0">
+                <a:solidFill>
+                  <a:srgbClr val="000000"/>
+                </a:solidFill>
+                <a:latin typeface="맑은 고딕"/>
+              </a:rPr>
+              <a:t>포화 이벤트 윈도우 설계 </a:t>
+            </a:r>
+            <a:r>
+              <a:rPr lang="en-US" altLang="ko-KR" sz="1200" dirty="0">
+                <a:solidFill>
+                  <a:srgbClr val="000000"/>
+                </a:solidFill>
+                <a:latin typeface="맑은 고딕"/>
+              </a:rPr>
+              <a:t>— </a:t>
+            </a:r>
+            <a:r>
+              <a:rPr lang="ko-KR" altLang="en-US" sz="1200" dirty="0">
+                <a:solidFill>
+                  <a:srgbClr val="000000"/>
+                </a:solidFill>
+                <a:latin typeface="맑은 고딕"/>
+              </a:rPr>
+              <a:t>기술적 분석이며 인과관계 식별 아님</a:t>
+            </a:r>
+          </a:p>
+        </p:txBody>
+      </p:sp>
+      <p:sp>
+        <p:nvSpPr>
+          <p:cNvPr id="4" name="Slide Number Placeholder 3"/>
+          <p:cNvSpPr>
+            <a:spLocks noGrp="1"/>
+          </p:cNvSpPr>
+          <p:nvPr>
+            <p:ph type="sldNum" sz="quarter" idx="5"/>
+          </p:nvPr>
+        </p:nvSpPr>
+        <p:spPr/>
+        <p:txBody>
+          <a:bodyPr/>
+          <a:lstStyle/>
+          <a:p>
+            <a:fld id="{28C0214D-37E7-CF45-B364-3BB5BAE4A2BF}" type="slidenum">
+              <a:rPr lang="en-US" smtClean="0"/>
+              <a:t>1</a:t>
+            </a:fld>
+            <a:endParaRPr lang="en-US"/>
+          </a:p>
+        </p:txBody>
+      </p:sp>
+    </p:spTree>
+    <p:extLst>
+      <p:ext uri="{BB962C8B-B14F-4D97-AF65-F5344CB8AC3E}">
+        <p14:creationId xmlns:p14="http://schemas.microsoft.com/office/powerpoint/2010/main" val="1828991920"/>
+      </p:ext>
+    </p:extLst>
+  </p:cSld>
+  <p:clrMapOvr>
+    <a:masterClrMapping/>
+  </p:clrMapOvr>
+</p:notes>
 </file>
 
 <file path=ppt/slideLayouts/slideLayout1.xml><?xml version="1.0" encoding="utf-8"?>
@@ -3201,7 +3716,7 @@
         <p:spPr>
           <a:xfrm>
             <a:off x="640080" y="2926080"/>
-            <a:ext cx="10881360" cy="3657600"/>
+            <a:ext cx="10881360" cy="1323439"/>
           </a:xfrm>
           <a:prstGeom prst="rect">
             <a:avLst/>
@@ -3214,7 +3729,7 @@
           </a:bodyPr>
           <a:lstStyle/>
           <a:p>
-            <a:endParaRPr/>
+            <a:endParaRPr dirty="0"/>
           </a:p>
           <a:p>
             <a:pPr>
@@ -3223,22 +3738,94 @@
               </a:spcBef>
             </a:pPr>
             <a:r>
-              <a:rPr sz="1400" b="1">
-                <a:solidFill>
-                  <a:srgbClr val="000000"/>
-                </a:solidFill>
-                <a:latin typeface="맑은 고딕"/>
-              </a:rPr>
-              <a:t>분석 대상:  </a:t>
-            </a:r>
-            <a:r>
-              <a:rPr sz="1400">
-                <a:solidFill>
-                  <a:srgbClr val="000000"/>
-                </a:solidFill>
-                <a:latin typeface="맑은 고딕"/>
-              </a:rPr>
-              <a:t>월별 지수 PBR: KOSPI · TOPIX · S&amp;P 500 · MSCI EM  |  2004년 1월 – 2024년 12월  |  관측치 1,008개</a:t>
+              <a:rPr sz="1400" b="1" dirty="0" err="1">
+                <a:solidFill>
+                  <a:srgbClr val="000000"/>
+                </a:solidFill>
+                <a:latin typeface="맑은 고딕"/>
+              </a:rPr>
+              <a:t>분석</a:t>
+            </a:r>
+            <a:r>
+              <a:rPr sz="1400" b="1" dirty="0">
+                <a:solidFill>
+                  <a:srgbClr val="000000"/>
+                </a:solidFill>
+                <a:latin typeface="맑은 고딕"/>
+              </a:rPr>
+              <a:t> </a:t>
+            </a:r>
+            <a:r>
+              <a:rPr sz="1400" b="1" dirty="0" err="1">
+                <a:solidFill>
+                  <a:srgbClr val="000000"/>
+                </a:solidFill>
+                <a:latin typeface="맑은 고딕"/>
+              </a:rPr>
+              <a:t>대상</a:t>
+            </a:r>
+            <a:r>
+              <a:rPr sz="1400" b="1" dirty="0">
+                <a:solidFill>
+                  <a:srgbClr val="000000"/>
+                </a:solidFill>
+                <a:latin typeface="맑은 고딕"/>
+              </a:rPr>
+              <a:t>:  </a:t>
+            </a:r>
+            <a:r>
+              <a:rPr sz="1400" dirty="0" err="1">
+                <a:solidFill>
+                  <a:srgbClr val="000000"/>
+                </a:solidFill>
+                <a:latin typeface="맑은 고딕"/>
+              </a:rPr>
+              <a:t>월별</a:t>
+            </a:r>
+            <a:r>
+              <a:rPr sz="1400" dirty="0">
+                <a:solidFill>
+                  <a:srgbClr val="000000"/>
+                </a:solidFill>
+                <a:latin typeface="맑은 고딕"/>
+              </a:rPr>
+              <a:t> </a:t>
+            </a:r>
+            <a:r>
+              <a:rPr sz="1400" dirty="0" err="1">
+                <a:solidFill>
+                  <a:srgbClr val="000000"/>
+                </a:solidFill>
+                <a:latin typeface="맑은 고딕"/>
+              </a:rPr>
+              <a:t>지수</a:t>
+            </a:r>
+            <a:r>
+              <a:rPr sz="1400" dirty="0">
+                <a:solidFill>
+                  <a:srgbClr val="000000"/>
+                </a:solidFill>
+                <a:latin typeface="맑은 고딕"/>
+              </a:rPr>
+              <a:t> PBR: KOSPI · TOPIX · S&amp;P 500 · MSCI EM  |  2004년 1월 – 2024년 12월  |  </a:t>
+            </a:r>
+            <a:r>
+              <a:rPr sz="1400" dirty="0" err="1">
+                <a:solidFill>
+                  <a:srgbClr val="000000"/>
+                </a:solidFill>
+                <a:latin typeface="맑은 고딕"/>
+              </a:rPr>
+              <a:t>관측치</a:t>
+            </a:r>
+            <a:r>
+              <a:rPr sz="1400" dirty="0">
+                <a:solidFill>
+                  <a:srgbClr val="000000"/>
+                </a:solidFill>
+                <a:latin typeface="맑은 고딕"/>
+              </a:rPr>
+              <a:t> 1,008개</a:t>
             </a:r>
           </a:p>
           <a:p>
@@ -3248,23 +3835,137 @@
               </a:spcBef>
             </a:pPr>
             <a:r>
-              <a:rPr sz="1400" b="1">
-                <a:solidFill>
-                  <a:srgbClr val="000000"/>
-                </a:solidFill>
-                <a:latin typeface="맑은 고딕"/>
-              </a:rPr>
-              <a:t>핵심 결과:  </a:t>
-            </a:r>
-            <a:r>
-              <a:rPr sz="1400">
-                <a:solidFill>
-                  <a:srgbClr val="000000"/>
-                </a:solidFill>
-                <a:latin typeface="맑은 고딕"/>
-              </a:rPr>
-              <a:t>KOSPI PBR은 TOPIX 대비 평균 –0.177배 (t = –3.23), MSCI EM 대비 –0.601배 (t = –10.30) 낮음</a:t>
-            </a:r>
+              <a:rPr sz="1400" b="1" dirty="0" err="1">
+                <a:solidFill>
+                  <a:srgbClr val="000000"/>
+                </a:solidFill>
+                <a:latin typeface="맑은 고딕"/>
+              </a:rPr>
+              <a:t>핵심</a:t>
+            </a:r>
+            <a:r>
+              <a:rPr sz="1400" b="1" dirty="0">
+                <a:solidFill>
+                  <a:srgbClr val="000000"/>
+                </a:solidFill>
+                <a:latin typeface="맑은 고딕"/>
+              </a:rPr>
+              <a:t> </a:t>
+            </a:r>
+            <a:r>
+              <a:rPr sz="1400" b="1" dirty="0" err="1">
+                <a:solidFill>
+                  <a:srgbClr val="000000"/>
+                </a:solidFill>
+                <a:latin typeface="맑은 고딕"/>
+              </a:rPr>
+              <a:t>결과</a:t>
+            </a:r>
+            <a:r>
+              <a:rPr sz="1400" b="1" dirty="0">
+                <a:solidFill>
+                  <a:srgbClr val="000000"/>
+                </a:solidFill>
+                <a:latin typeface="맑은 고딕"/>
+              </a:rPr>
+              <a:t>:  </a:t>
+            </a:r>
+            <a:r>
+              <a:rPr sz="1400" dirty="0">
+                <a:solidFill>
+                  <a:srgbClr val="000000"/>
+                </a:solidFill>
+                <a:latin typeface="맑은 고딕"/>
+              </a:rPr>
+              <a:t>KOSPI </a:t>
+            </a:r>
+            <a:r>
+              <a:rPr sz="1400" dirty="0" err="1">
+                <a:solidFill>
+                  <a:srgbClr val="000000"/>
+                </a:solidFill>
+                <a:latin typeface="맑은 고딕"/>
+              </a:rPr>
+              <a:t>PBR은</a:t>
+            </a:r>
+            <a:r>
+              <a:rPr sz="1400" dirty="0">
+                <a:solidFill>
+                  <a:srgbClr val="000000"/>
+                </a:solidFill>
+                <a:latin typeface="맑은 고딕"/>
+              </a:rPr>
+              <a:t> TOPIX </a:t>
+            </a:r>
+            <a:r>
+              <a:rPr sz="1400" dirty="0" err="1">
+                <a:solidFill>
+                  <a:srgbClr val="000000"/>
+                </a:solidFill>
+                <a:latin typeface="맑은 고딕"/>
+              </a:rPr>
+              <a:t>대비</a:t>
+            </a:r>
+            <a:r>
+              <a:rPr sz="1400" dirty="0">
+                <a:solidFill>
+                  <a:srgbClr val="000000"/>
+                </a:solidFill>
+                <a:latin typeface="맑은 고딕"/>
+              </a:rPr>
+              <a:t> </a:t>
+            </a:r>
+            <a:r>
+              <a:rPr sz="1400" dirty="0" err="1">
+                <a:solidFill>
+                  <a:srgbClr val="000000"/>
+                </a:solidFill>
+                <a:latin typeface="맑은 고딕"/>
+              </a:rPr>
+              <a:t>평균</a:t>
+            </a:r>
+            <a:r>
+              <a:rPr sz="1400" dirty="0">
+                <a:solidFill>
+                  <a:srgbClr val="000000"/>
+                </a:solidFill>
+                <a:latin typeface="맑은 고딕"/>
+              </a:rPr>
+              <a:t> –0.177배 (t = –3.23), MSCI EM </a:t>
+            </a:r>
+            <a:r>
+              <a:rPr sz="1400" dirty="0" err="1">
+                <a:solidFill>
+                  <a:srgbClr val="000000"/>
+                </a:solidFill>
+                <a:latin typeface="맑은 고딕"/>
+              </a:rPr>
+              <a:t>대비</a:t>
+            </a:r>
+            <a:r>
+              <a:rPr sz="1400" dirty="0">
+                <a:solidFill>
+                  <a:srgbClr val="000000"/>
+                </a:solidFill>
+                <a:latin typeface="맑은 고딕"/>
+              </a:rPr>
+              <a:t> –0.601배 (t = –10.30) </a:t>
+            </a:r>
+            <a:r>
+              <a:rPr sz="1400" dirty="0" err="1">
+                <a:solidFill>
+                  <a:srgbClr val="000000"/>
+                </a:solidFill>
+                <a:latin typeface="맑은 고딕"/>
+              </a:rPr>
+              <a:t>낮음</a:t>
+            </a:r>
+            <a:endParaRPr sz="1400" dirty="0">
+              <a:solidFill>
+                <a:srgbClr val="000000"/>
+              </a:solidFill>
+              <a:latin typeface="맑은 고딕"/>
+            </a:endParaRPr>
           </a:p>
           <a:p>
             <a:pPr>
@@ -3273,48 +3974,218 @@
               </a:spcBef>
             </a:pPr>
             <a:r>
-              <a:rPr sz="1400" b="1">
-                <a:solidFill>
-                  <a:srgbClr val="000000"/>
-                </a:solidFill>
-                <a:latin typeface="맑은 고딕"/>
-              </a:rPr>
-              <a:t>접근 방법:  </a:t>
-            </a:r>
-            <a:r>
-              <a:rPr sz="1400">
-                <a:solidFill>
-                  <a:srgbClr val="000000"/>
-                </a:solidFill>
-                <a:latin typeface="맑은 고딕"/>
-              </a:rPr>
-              <a:t>일본의 3단계 지배구조 개혁을 정책 벤치마크로 활용; 이벤트 윈도우 · 패널 OLS · 합성통제법</a:t>
-            </a:r>
-          </a:p>
-          <a:p>
-            <a:pPr>
-              <a:spcBef>
-                <a:spcPts val="800"/>
-              </a:spcBef>
-            </a:pPr>
-            <a:r>
-              <a:rPr sz="1400" b="1">
-                <a:solidFill>
-                  <a:srgbClr val="000000"/>
-                </a:solidFill>
-                <a:latin typeface="맑은 고딕"/>
-              </a:rPr>
-              <a:t>주의사항:  </a:t>
-            </a:r>
-            <a:r>
-              <a:rPr sz="1400">
-                <a:solidFill>
-                  <a:srgbClr val="000000"/>
-                </a:solidFill>
-                <a:latin typeface="맑은 고딕"/>
-              </a:rPr>
-              <a:t>국가 클러스터 N = 4; 포화 이벤트 윈도우 설계 — 기술적 분석이며 인과관계 식별 아님</a:t>
-            </a:r>
+              <a:rPr sz="1400" b="1" dirty="0" err="1">
+                <a:solidFill>
+                  <a:srgbClr val="000000"/>
+                </a:solidFill>
+                <a:latin typeface="맑은 고딕"/>
+              </a:rPr>
+              <a:t>접근</a:t>
+            </a:r>
+            <a:r>
+              <a:rPr sz="1400" b="1" dirty="0">
+                <a:solidFill>
+                  <a:srgbClr val="000000"/>
+                </a:solidFill>
+                <a:latin typeface="맑은 고딕"/>
+              </a:rPr>
+              <a:t> </a:t>
+            </a:r>
+            <a:r>
+              <a:rPr sz="1400" b="1" dirty="0" err="1">
+                <a:solidFill>
+                  <a:srgbClr val="000000"/>
+                </a:solidFill>
+                <a:latin typeface="맑은 고딕"/>
+              </a:rPr>
+              <a:t>방법</a:t>
+            </a:r>
+            <a:r>
+              <a:rPr sz="1400" b="1" dirty="0">
+                <a:solidFill>
+                  <a:srgbClr val="000000"/>
+                </a:solidFill>
+                <a:latin typeface="맑은 고딕"/>
+              </a:rPr>
+              <a:t>:  </a:t>
+            </a:r>
+            <a:r>
+              <a:rPr sz="1400" dirty="0" err="1">
+                <a:solidFill>
+                  <a:srgbClr val="000000"/>
+                </a:solidFill>
+                <a:latin typeface="맑은 고딕"/>
+              </a:rPr>
+              <a:t>일본의</a:t>
+            </a:r>
+            <a:r>
+              <a:rPr sz="1400" dirty="0">
+                <a:solidFill>
+                  <a:srgbClr val="000000"/>
+                </a:solidFill>
+                <a:latin typeface="맑은 고딕"/>
+              </a:rPr>
+              <a:t> 3단계 </a:t>
+            </a:r>
+            <a:r>
+              <a:rPr sz="1400" dirty="0" err="1">
+                <a:solidFill>
+                  <a:srgbClr val="000000"/>
+                </a:solidFill>
+                <a:latin typeface="맑은 고딕"/>
+              </a:rPr>
+              <a:t>지배구조</a:t>
+            </a:r>
+            <a:r>
+              <a:rPr sz="1400" dirty="0">
+                <a:solidFill>
+                  <a:srgbClr val="000000"/>
+                </a:solidFill>
+                <a:latin typeface="맑은 고딕"/>
+              </a:rPr>
+              <a:t> </a:t>
+            </a:r>
+            <a:r>
+              <a:rPr sz="1400" dirty="0" err="1">
+                <a:solidFill>
+                  <a:srgbClr val="000000"/>
+                </a:solidFill>
+                <a:latin typeface="맑은 고딕"/>
+              </a:rPr>
+              <a:t>개혁을</a:t>
+            </a:r>
+            <a:r>
+              <a:rPr sz="1400" dirty="0">
+                <a:solidFill>
+                  <a:srgbClr val="000000"/>
+                </a:solidFill>
+                <a:latin typeface="맑은 고딕"/>
+              </a:rPr>
+              <a:t> </a:t>
+            </a:r>
+            <a:r>
+              <a:rPr sz="1400" dirty="0" err="1">
+                <a:solidFill>
+                  <a:srgbClr val="000000"/>
+                </a:solidFill>
+                <a:latin typeface="맑은 고딕"/>
+              </a:rPr>
+              <a:t>정책</a:t>
+            </a:r>
+            <a:r>
+              <a:rPr sz="1400" dirty="0">
+                <a:solidFill>
+                  <a:srgbClr val="000000"/>
+                </a:solidFill>
+                <a:latin typeface="맑은 고딕"/>
+              </a:rPr>
+              <a:t> </a:t>
+            </a:r>
+            <a:r>
+              <a:rPr sz="1400" dirty="0" err="1">
+                <a:solidFill>
+                  <a:srgbClr val="000000"/>
+                </a:solidFill>
+                <a:latin typeface="맑은 고딕"/>
+              </a:rPr>
+              <a:t>벤치마크로</a:t>
+            </a:r>
+            <a:r>
+              <a:rPr sz="1400" dirty="0">
+                <a:solidFill>
+                  <a:srgbClr val="000000"/>
+                </a:solidFill>
+                <a:latin typeface="맑은 고딕"/>
+              </a:rPr>
+              <a:t> </a:t>
+            </a:r>
+            <a:r>
+              <a:rPr sz="1400" dirty="0" err="1">
+                <a:solidFill>
+                  <a:srgbClr val="000000"/>
+                </a:solidFill>
+                <a:latin typeface="맑은 고딕"/>
+              </a:rPr>
+              <a:t>활용</a:t>
+            </a:r>
+            <a:r>
+              <a:rPr sz="1400" dirty="0">
+                <a:solidFill>
+                  <a:srgbClr val="000000"/>
+                </a:solidFill>
+                <a:latin typeface="맑은 고딕"/>
+              </a:rPr>
+              <a:t>; </a:t>
+            </a:r>
+            <a:r>
+              <a:rPr sz="1400" dirty="0" err="1">
+                <a:solidFill>
+                  <a:srgbClr val="000000"/>
+                </a:solidFill>
+                <a:latin typeface="맑은 고딕"/>
+              </a:rPr>
+              <a:t>이벤트</a:t>
+            </a:r>
+            <a:r>
+              <a:rPr sz="1400" dirty="0">
+                <a:solidFill>
+                  <a:srgbClr val="000000"/>
+                </a:solidFill>
+                <a:latin typeface="맑은 고딕"/>
+              </a:rPr>
+              <a:t> </a:t>
+            </a:r>
+            <a:r>
+              <a:rPr sz="1400" dirty="0" err="1">
+                <a:solidFill>
+                  <a:srgbClr val="000000"/>
+                </a:solidFill>
+                <a:latin typeface="맑은 고딕"/>
+              </a:rPr>
+              <a:t>윈도우</a:t>
+            </a:r>
+            <a:r>
+              <a:rPr sz="1400" dirty="0">
+                <a:solidFill>
+                  <a:srgbClr val="000000"/>
+                </a:solidFill>
+                <a:latin typeface="맑은 고딕"/>
+              </a:rPr>
+              <a:t> · </a:t>
+            </a:r>
+            <a:r>
+              <a:rPr sz="1400" dirty="0" err="1">
+                <a:solidFill>
+                  <a:srgbClr val="000000"/>
+                </a:solidFill>
+                <a:latin typeface="맑은 고딕"/>
+              </a:rPr>
+              <a:t>패널</a:t>
+            </a:r>
+            <a:r>
+              <a:rPr sz="1400" dirty="0">
+                <a:solidFill>
+                  <a:srgbClr val="000000"/>
+                </a:solidFill>
+                <a:latin typeface="맑은 고딕"/>
+              </a:rPr>
+              <a:t> OLS · </a:t>
+            </a:r>
+            <a:r>
+              <a:rPr sz="1400" dirty="0" err="1">
+                <a:solidFill>
+                  <a:srgbClr val="000000"/>
+                </a:solidFill>
+                <a:latin typeface="맑은 고딕"/>
+              </a:rPr>
+              <a:t>합성통제법</a:t>
+            </a:r>
+            <a:endParaRPr sz="1400" dirty="0">
+              <a:solidFill>
+                <a:srgbClr val="000000"/>
+              </a:solidFill>
+              <a:latin typeface="맑은 고딕"/>
+            </a:endParaRPr>
           </a:p>
         </p:txBody>
       </p:sp>
@@ -6313,7 +7184,7 @@
         <p:spPr>
           <a:xfrm>
             <a:off x="502920" y="137160"/>
-            <a:ext cx="11155680" cy="685800"/>
+            <a:ext cx="11155680" cy="523220"/>
           </a:xfrm>
           <a:prstGeom prst="rect">
             <a:avLst/>
@@ -6328,13 +7199,13 @@
           <a:p>
             <a:pPr algn="l"/>
             <a:r>
-              <a:rPr sz="2800" b="1" dirty="0" err="1">
-                <a:solidFill>
-                  <a:srgbClr val="000000"/>
-                </a:solidFill>
-                <a:latin typeface="맑은 고딕"/>
-              </a:rPr>
-              <a:t>그림</a:t>
+              <a:rPr lang="ko-KR" altLang="en-US" sz="2800" b="1" dirty="0">
+                <a:solidFill>
+                  <a:srgbClr val="000000"/>
+                </a:solidFill>
+                <a:latin typeface="맑은 고딕"/>
+              </a:rPr>
+              <a:t>피겨</a:t>
             </a:r>
             <a:r>
               <a:rPr sz="2800" b="1" dirty="0">
@@ -6997,7 +7868,7 @@
         <p:spPr>
           <a:xfrm>
             <a:off x="3812539" y="1323340"/>
-            <a:ext cx="8102600" cy="1381760"/>
+            <a:ext cx="8102600" cy="461665"/>
           </a:xfrm>
           <a:prstGeom prst="rect">
             <a:avLst/>
@@ -7011,13 +7882,346 @@
           <a:lstStyle/>
           <a:p>
             <a:r>
-              <a:rPr sz="1200" b="0">
-                <a:solidFill>
-                  <a:srgbClr val="000000"/>
-                </a:solidFill>
-                <a:latin typeface="맑은 고딕"/>
-              </a:rPr>
-              <a:t>기관투자자에게 참여 정책 수립 및 의결권 행사 내역 공시 의무화. Comply-or-explain 방식으로 높은 이행률 달성. 케이레츠 교차보유 해소 촉진 (Miyajima 2023).</a:t>
+              <a:rPr sz="1200" b="0" dirty="0" err="1">
+                <a:solidFill>
+                  <a:srgbClr val="000000"/>
+                </a:solidFill>
+                <a:latin typeface="맑은 고딕"/>
+              </a:rPr>
+              <a:t>기관투자자에게</a:t>
+            </a:r>
+            <a:r>
+              <a:rPr sz="1200" b="0" dirty="0">
+                <a:solidFill>
+                  <a:srgbClr val="000000"/>
+                </a:solidFill>
+                <a:latin typeface="맑은 고딕"/>
+              </a:rPr>
+              <a:t> </a:t>
+            </a:r>
+            <a:r>
+              <a:rPr sz="1200" b="0" dirty="0" err="1">
+                <a:solidFill>
+                  <a:srgbClr val="000000"/>
+                </a:solidFill>
+                <a:latin typeface="맑은 고딕"/>
+              </a:rPr>
+              <a:t>참여</a:t>
+            </a:r>
+            <a:r>
+              <a:rPr sz="1200" b="0" dirty="0">
+                <a:solidFill>
+                  <a:srgbClr val="000000"/>
+                </a:solidFill>
+                <a:latin typeface="맑은 고딕"/>
+              </a:rPr>
+              <a:t> </a:t>
+            </a:r>
+            <a:r>
+              <a:rPr sz="1200" b="0" dirty="0" err="1">
+                <a:solidFill>
+                  <a:srgbClr val="000000"/>
+                </a:solidFill>
+                <a:latin typeface="맑은 고딕"/>
+              </a:rPr>
+              <a:t>정책</a:t>
+            </a:r>
+            <a:r>
+              <a:rPr sz="1200" b="0" dirty="0">
+                <a:solidFill>
+                  <a:srgbClr val="000000"/>
+                </a:solidFill>
+                <a:latin typeface="맑은 고딕"/>
+              </a:rPr>
+              <a:t> </a:t>
+            </a:r>
+            <a:r>
+              <a:rPr sz="1200" b="0" dirty="0" err="1">
+                <a:solidFill>
+                  <a:srgbClr val="000000"/>
+                </a:solidFill>
+                <a:latin typeface="맑은 고딕"/>
+              </a:rPr>
+              <a:t>수립</a:t>
+            </a:r>
+            <a:r>
+              <a:rPr sz="1200" b="0" dirty="0">
+                <a:solidFill>
+                  <a:srgbClr val="000000"/>
+                </a:solidFill>
+                <a:latin typeface="맑은 고딕"/>
+              </a:rPr>
+              <a:t> </a:t>
+            </a:r>
+            <a:r>
+              <a:rPr sz="1200" b="0" dirty="0" err="1">
+                <a:solidFill>
+                  <a:srgbClr val="000000"/>
+                </a:solidFill>
+                <a:latin typeface="맑은 고딕"/>
+              </a:rPr>
+              <a:t>및</a:t>
+            </a:r>
+            <a:r>
+              <a:rPr sz="1200" b="0" dirty="0">
+                <a:solidFill>
+                  <a:srgbClr val="000000"/>
+                </a:solidFill>
+                <a:latin typeface="맑은 고딕"/>
+              </a:rPr>
+              <a:t> </a:t>
+            </a:r>
+            <a:r>
+              <a:rPr sz="1200" b="0" dirty="0" err="1">
+                <a:solidFill>
+                  <a:srgbClr val="000000"/>
+                </a:solidFill>
+                <a:latin typeface="맑은 고딕"/>
+              </a:rPr>
+              <a:t>의결권</a:t>
+            </a:r>
+            <a:r>
+              <a:rPr sz="1200" b="0" dirty="0">
+                <a:solidFill>
+                  <a:srgbClr val="000000"/>
+                </a:solidFill>
+                <a:latin typeface="맑은 고딕"/>
+              </a:rPr>
+              <a:t> </a:t>
+            </a:r>
+            <a:r>
+              <a:rPr sz="1200" b="0" dirty="0" err="1">
+                <a:solidFill>
+                  <a:srgbClr val="000000"/>
+                </a:solidFill>
+                <a:latin typeface="맑은 고딕"/>
+              </a:rPr>
+              <a:t>행사</a:t>
+            </a:r>
+            <a:r>
+              <a:rPr sz="1200" b="0" dirty="0">
+                <a:solidFill>
+                  <a:srgbClr val="000000"/>
+                </a:solidFill>
+                <a:latin typeface="맑은 고딕"/>
+              </a:rPr>
+              <a:t> </a:t>
+            </a:r>
+            <a:r>
+              <a:rPr sz="1200" b="0" dirty="0" err="1">
+                <a:solidFill>
+                  <a:srgbClr val="000000"/>
+                </a:solidFill>
+                <a:latin typeface="맑은 고딕"/>
+              </a:rPr>
+              <a:t>내역</a:t>
+            </a:r>
+            <a:r>
+              <a:rPr sz="1200" b="0" dirty="0">
+                <a:solidFill>
+                  <a:srgbClr val="000000"/>
+                </a:solidFill>
+                <a:latin typeface="맑은 고딕"/>
+              </a:rPr>
+              <a:t> </a:t>
+            </a:r>
+            <a:r>
+              <a:rPr sz="1200" b="0" dirty="0" err="1">
+                <a:solidFill>
+                  <a:srgbClr val="000000"/>
+                </a:solidFill>
+                <a:latin typeface="맑은 고딕"/>
+              </a:rPr>
+              <a:t>공시</a:t>
+            </a:r>
+            <a:r>
+              <a:rPr sz="1200" b="0" dirty="0">
+                <a:solidFill>
+                  <a:srgbClr val="000000"/>
+                </a:solidFill>
+                <a:latin typeface="맑은 고딕"/>
+              </a:rPr>
+              <a:t> </a:t>
+            </a:r>
+            <a:r>
+              <a:rPr sz="1200" b="0" dirty="0" err="1">
+                <a:solidFill>
+                  <a:srgbClr val="000000"/>
+                </a:solidFill>
+                <a:latin typeface="맑은 고딕"/>
+              </a:rPr>
+              <a:t>의무화</a:t>
+            </a:r>
+            <a:r>
+              <a:rPr sz="1200" b="0" dirty="0">
+                <a:solidFill>
+                  <a:srgbClr val="000000"/>
+                </a:solidFill>
+                <a:latin typeface="맑은 고딕"/>
+              </a:rPr>
+              <a:t>. </a:t>
+            </a:r>
+            <a:r>
+              <a:rPr lang="ko-KR" altLang="en-US" sz="1200" b="0" dirty="0">
+                <a:solidFill>
+                  <a:srgbClr val="000000"/>
+                </a:solidFill>
+                <a:latin typeface="맑은 고딕"/>
+              </a:rPr>
+              <a:t>준수 및 해명</a:t>
+            </a:r>
+            <a:r>
+              <a:rPr sz="1200" b="0" dirty="0">
+                <a:solidFill>
+                  <a:srgbClr val="000000"/>
+                </a:solidFill>
+                <a:latin typeface="맑은 고딕"/>
+              </a:rPr>
+              <a:t> </a:t>
+            </a:r>
+            <a:r>
+              <a:rPr sz="1200" b="0" dirty="0" err="1">
+                <a:solidFill>
+                  <a:srgbClr val="000000"/>
+                </a:solidFill>
+                <a:latin typeface="맑은 고딕"/>
+              </a:rPr>
+              <a:t>방식으로</a:t>
+            </a:r>
+            <a:r>
+              <a:rPr sz="1200" b="0" dirty="0">
+                <a:solidFill>
+                  <a:srgbClr val="000000"/>
+                </a:solidFill>
+                <a:latin typeface="맑은 고딕"/>
+              </a:rPr>
+              <a:t> </a:t>
+            </a:r>
+            <a:r>
+              <a:rPr sz="1200" b="0" dirty="0" err="1">
+                <a:solidFill>
+                  <a:srgbClr val="000000"/>
+                </a:solidFill>
+                <a:latin typeface="맑은 고딕"/>
+              </a:rPr>
+              <a:t>높은</a:t>
+            </a:r>
+            <a:r>
+              <a:rPr sz="1200" b="0" dirty="0">
+                <a:solidFill>
+                  <a:srgbClr val="000000"/>
+                </a:solidFill>
+                <a:latin typeface="맑은 고딕"/>
+              </a:rPr>
+              <a:t> </a:t>
+            </a:r>
+            <a:r>
+              <a:rPr sz="1200" b="0" dirty="0" err="1">
+                <a:solidFill>
+                  <a:srgbClr val="000000"/>
+                </a:solidFill>
+                <a:latin typeface="맑은 고딕"/>
+              </a:rPr>
+              <a:t>이행률</a:t>
+            </a:r>
+            <a:r>
+              <a:rPr sz="1200" b="0" dirty="0">
+                <a:solidFill>
+                  <a:srgbClr val="000000"/>
+                </a:solidFill>
+                <a:latin typeface="맑은 고딕"/>
+              </a:rPr>
+              <a:t> </a:t>
+            </a:r>
+            <a:r>
+              <a:rPr sz="1200" b="0" dirty="0" err="1">
+                <a:solidFill>
+                  <a:srgbClr val="000000"/>
+                </a:solidFill>
+                <a:latin typeface="맑은 고딕"/>
+              </a:rPr>
+              <a:t>달성</a:t>
+            </a:r>
+            <a:r>
+              <a:rPr sz="1200" b="0" dirty="0">
+                <a:solidFill>
+                  <a:srgbClr val="000000"/>
+                </a:solidFill>
+                <a:latin typeface="맑은 고딕"/>
+              </a:rPr>
+              <a:t>. </a:t>
+            </a:r>
+            <a:r>
+              <a:rPr sz="1200" b="0" dirty="0" err="1">
+                <a:solidFill>
+                  <a:srgbClr val="000000"/>
+                </a:solidFill>
+                <a:latin typeface="맑은 고딕"/>
+              </a:rPr>
+              <a:t>케이레츠</a:t>
+            </a:r>
+            <a:r>
+              <a:rPr sz="1200" b="0" dirty="0">
+                <a:solidFill>
+                  <a:srgbClr val="000000"/>
+                </a:solidFill>
+                <a:latin typeface="맑은 고딕"/>
+              </a:rPr>
+              <a:t> </a:t>
+            </a:r>
+            <a:r>
+              <a:rPr sz="1200" b="0" dirty="0" err="1">
+                <a:solidFill>
+                  <a:srgbClr val="000000"/>
+                </a:solidFill>
+                <a:latin typeface="맑은 고딕"/>
+              </a:rPr>
+              <a:t>교차보유</a:t>
+            </a:r>
+            <a:r>
+              <a:rPr sz="1200" b="0" dirty="0">
+                <a:solidFill>
+                  <a:srgbClr val="000000"/>
+                </a:solidFill>
+                <a:latin typeface="맑은 고딕"/>
+              </a:rPr>
+              <a:t> </a:t>
+            </a:r>
+            <a:r>
+              <a:rPr sz="1200" b="0" dirty="0" err="1">
+                <a:solidFill>
+                  <a:srgbClr val="000000"/>
+                </a:solidFill>
+                <a:latin typeface="맑은 고딕"/>
+              </a:rPr>
+              <a:t>해소</a:t>
+            </a:r>
+            <a:r>
+              <a:rPr sz="1200" b="0" dirty="0">
+                <a:solidFill>
+                  <a:srgbClr val="000000"/>
+                </a:solidFill>
+                <a:latin typeface="맑은 고딕"/>
+              </a:rPr>
+              <a:t> </a:t>
+            </a:r>
+            <a:r>
+              <a:rPr sz="1200" b="0" dirty="0" err="1">
+                <a:solidFill>
+                  <a:srgbClr val="000000"/>
+                </a:solidFill>
+                <a:latin typeface="맑은 고딕"/>
+              </a:rPr>
+              <a:t>촉진</a:t>
+            </a:r>
+            <a:r>
+              <a:rPr sz="1200" b="0" dirty="0">
+                <a:solidFill>
+                  <a:srgbClr val="000000"/>
+                </a:solidFill>
+                <a:latin typeface="맑은 고딕"/>
+              </a:rPr>
+              <a:t> (Miyajima 2023).</a:t>
             </a:r>
           </a:p>
         </p:txBody>
@@ -9099,7 +10303,7 @@
         <p:spPr>
           <a:xfrm>
             <a:off x="502920" y="1234440"/>
-            <a:ext cx="5303520" cy="2462213"/>
+            <a:ext cx="5303520" cy="2223686"/>
           </a:xfrm>
           <a:prstGeom prst="rect">
             <a:avLst/>
@@ -9580,91 +10784,6 @@
                 <a:latin typeface="맑은 고딕"/>
               </a:rPr>
               <a:t>하위지수</a:t>
-            </a:r>
-            <a:endParaRPr sz="1300" b="0" i="0" dirty="0">
-              <a:solidFill>
-                <a:srgbClr val="000000"/>
-              </a:solidFill>
-              <a:latin typeface="맑은 고딕"/>
-            </a:endParaRPr>
-          </a:p>
-          <a:p>
-            <a:pPr lvl="1">
-              <a:spcBef>
-                <a:spcPts val="300"/>
-              </a:spcBef>
-            </a:pPr>
-            <a:r>
-              <a:rPr sz="1300" b="0" i="0" dirty="0">
-                <a:solidFill>
-                  <a:srgbClr val="000000"/>
-                </a:solidFill>
-                <a:latin typeface="맑은 고딕"/>
-              </a:rPr>
-              <a:t>•  4개 </a:t>
-            </a:r>
-            <a:r>
-              <a:rPr sz="1300" b="0" i="0" dirty="0" err="1">
-                <a:solidFill>
-                  <a:srgbClr val="000000"/>
-                </a:solidFill>
-                <a:latin typeface="맑은 고딕"/>
-              </a:rPr>
-              <a:t>시계열</a:t>
-            </a:r>
-            <a:r>
-              <a:rPr sz="1300" b="0" i="0" dirty="0">
-                <a:solidFill>
-                  <a:srgbClr val="000000"/>
-                </a:solidFill>
-                <a:latin typeface="맑은 고딕"/>
-              </a:rPr>
-              <a:t> </a:t>
-            </a:r>
-            <a:r>
-              <a:rPr sz="1300" b="0" i="0" dirty="0" err="1">
-                <a:solidFill>
-                  <a:srgbClr val="000000"/>
-                </a:solidFill>
-                <a:latin typeface="맑은 고딕"/>
-              </a:rPr>
-              <a:t>모두</a:t>
-            </a:r>
-            <a:r>
-              <a:rPr sz="1300" b="0" i="0" dirty="0">
-                <a:solidFill>
-                  <a:srgbClr val="000000"/>
-                </a:solidFill>
-                <a:latin typeface="맑은 고딕"/>
-              </a:rPr>
-              <a:t> </a:t>
-            </a:r>
-            <a:r>
-              <a:rPr sz="1300" b="0" i="0" dirty="0" err="1">
-                <a:solidFill>
-                  <a:srgbClr val="000000"/>
-                </a:solidFill>
-                <a:latin typeface="맑은 고딕"/>
-              </a:rPr>
-              <a:t>결측값</a:t>
-            </a:r>
-            <a:r>
-              <a:rPr sz="1300" b="0" i="0" dirty="0">
-                <a:solidFill>
-                  <a:srgbClr val="000000"/>
-                </a:solidFill>
-                <a:latin typeface="맑은 고딕"/>
-              </a:rPr>
-              <a:t> </a:t>
-            </a:r>
-            <a:r>
-              <a:rPr sz="1300" b="0" i="0" dirty="0" err="1">
-                <a:solidFill>
-                  <a:srgbClr val="000000"/>
-                </a:solidFill>
-                <a:latin typeface="맑은 고딕"/>
-              </a:rPr>
-              <a:t>없음</a:t>
             </a:r>
             <a:endParaRPr sz="1300" b="0" i="0" dirty="0">
               <a:solidFill>
@@ -9728,7 +10847,7 @@
         <p:spPr>
           <a:xfrm>
             <a:off x="6172200" y="1234440"/>
-            <a:ext cx="5577840" cy="5349240"/>
+            <a:ext cx="5577840" cy="3262432"/>
           </a:xfrm>
           <a:prstGeom prst="rect">
             <a:avLst/>
@@ -9741,7 +10860,7 @@
           </a:bodyPr>
           <a:lstStyle/>
           <a:p>
-            <a:endParaRPr/>
+            <a:endParaRPr dirty="0"/>
           </a:p>
           <a:p>
             <a:pPr>
@@ -9750,14 +10869,92 @@
               </a:spcBef>
             </a:pPr>
             <a:r>
-              <a:rPr sz="1700" b="1" i="0">
-                <a:solidFill>
-                  <a:srgbClr val="000000"/>
-                </a:solidFill>
-                <a:latin typeface="맑은 고딕"/>
-              </a:rPr>
-              <a:t>세 가지 실증 분석 방법</a:t>
-            </a:r>
+              <a:rPr sz="1700" b="1" i="0" dirty="0" err="1">
+                <a:solidFill>
+                  <a:srgbClr val="000000"/>
+                </a:solidFill>
+                <a:latin typeface="맑은 고딕"/>
+              </a:rPr>
+              <a:t>세</a:t>
+            </a:r>
+            <a:r>
+              <a:rPr sz="1700" b="1" i="0" dirty="0">
+                <a:solidFill>
+                  <a:srgbClr val="000000"/>
+                </a:solidFill>
+                <a:latin typeface="맑은 고딕"/>
+              </a:rPr>
+              <a:t> </a:t>
+            </a:r>
+            <a:r>
+              <a:rPr sz="1700" b="1" i="0" dirty="0" err="1">
+                <a:solidFill>
+                  <a:srgbClr val="000000"/>
+                </a:solidFill>
+                <a:latin typeface="맑은 고딕"/>
+              </a:rPr>
+              <a:t>가지</a:t>
+            </a:r>
+            <a:r>
+              <a:rPr sz="1700" b="1" i="0" dirty="0">
+                <a:solidFill>
+                  <a:srgbClr val="000000"/>
+                </a:solidFill>
+                <a:latin typeface="맑은 고딕"/>
+              </a:rPr>
+              <a:t> </a:t>
+            </a:r>
+            <a:r>
+              <a:rPr sz="1700" b="1" i="0" dirty="0" err="1">
+                <a:solidFill>
+                  <a:srgbClr val="000000"/>
+                </a:solidFill>
+                <a:latin typeface="맑은 고딕"/>
+              </a:rPr>
+              <a:t>실증</a:t>
+            </a:r>
+            <a:r>
+              <a:rPr sz="1700" b="1" i="0" dirty="0">
+                <a:solidFill>
+                  <a:srgbClr val="000000"/>
+                </a:solidFill>
+                <a:latin typeface="맑은 고딕"/>
+              </a:rPr>
+              <a:t> </a:t>
+            </a:r>
+            <a:r>
+              <a:rPr sz="1700" b="1" i="0" dirty="0" err="1">
+                <a:solidFill>
+                  <a:srgbClr val="000000"/>
+                </a:solidFill>
+                <a:latin typeface="맑은 고딕"/>
+              </a:rPr>
+              <a:t>분석</a:t>
+            </a:r>
+            <a:r>
+              <a:rPr sz="1700" b="1" i="0" dirty="0">
+                <a:solidFill>
+                  <a:srgbClr val="000000"/>
+                </a:solidFill>
+                <a:latin typeface="맑은 고딕"/>
+              </a:rPr>
+              <a:t> </a:t>
+            </a:r>
+            <a:r>
+              <a:rPr sz="1700" b="1" i="0" dirty="0" err="1">
+                <a:solidFill>
+                  <a:srgbClr val="000000"/>
+                </a:solidFill>
+                <a:latin typeface="맑은 고딕"/>
+              </a:rPr>
+              <a:t>방법</a:t>
+            </a:r>
+            <a:endParaRPr sz="1700" b="1" i="0" dirty="0">
+              <a:solidFill>
+                <a:srgbClr val="000000"/>
+              </a:solidFill>
+              <a:latin typeface="맑은 고딕"/>
+            </a:endParaRPr>
           </a:p>
           <a:p>
             <a:pPr>
@@ -9766,13 +10963,94 @@
               </a:spcBef>
             </a:pPr>
             <a:r>
-              <a:rPr sz="1400" b="1" i="0">
-                <a:solidFill>
-                  <a:srgbClr val="000000"/>
-                </a:solidFill>
-                <a:latin typeface="맑은 고딕"/>
-              </a:rPr>
-              <a:t>이벤트 윈도우 분석  [주요 분석]</a:t>
+              <a:rPr sz="1400" b="1" i="0" dirty="0" err="1">
+                <a:solidFill>
+                  <a:srgbClr val="000000"/>
+                </a:solidFill>
+                <a:latin typeface="맑은 고딕"/>
+              </a:rPr>
+              <a:t>이벤트</a:t>
+            </a:r>
+            <a:r>
+              <a:rPr sz="1400" b="1" i="0" dirty="0">
+                <a:solidFill>
+                  <a:srgbClr val="000000"/>
+                </a:solidFill>
+                <a:latin typeface="맑은 고딕"/>
+              </a:rPr>
+              <a:t> </a:t>
+            </a:r>
+            <a:r>
+              <a:rPr sz="1400" b="1" i="0" dirty="0" err="1">
+                <a:solidFill>
+                  <a:srgbClr val="000000"/>
+                </a:solidFill>
+                <a:latin typeface="맑은 고딕"/>
+              </a:rPr>
+              <a:t>윈도우</a:t>
+            </a:r>
+            <a:r>
+              <a:rPr sz="1400" b="1" i="0" dirty="0">
+                <a:solidFill>
+                  <a:srgbClr val="000000"/>
+                </a:solidFill>
+                <a:latin typeface="맑은 고딕"/>
+              </a:rPr>
+              <a:t> </a:t>
+            </a:r>
+            <a:r>
+              <a:rPr sz="1400" b="1" i="0" dirty="0" err="1">
+                <a:solidFill>
+                  <a:srgbClr val="000000"/>
+                </a:solidFill>
+                <a:latin typeface="맑은 고딕"/>
+              </a:rPr>
+              <a:t>분석</a:t>
+            </a:r>
+            <a:r>
+              <a:rPr sz="1400" b="1" i="0" dirty="0">
+                <a:solidFill>
+                  <a:srgbClr val="000000"/>
+                </a:solidFill>
+                <a:latin typeface="맑은 고딕"/>
+              </a:rPr>
+              <a:t>  [</a:t>
+            </a:r>
+            <a:r>
+              <a:rPr sz="1400" b="1" i="0" dirty="0" err="1">
+                <a:solidFill>
+                  <a:srgbClr val="000000"/>
+                </a:solidFill>
+                <a:latin typeface="맑은 고딕"/>
+              </a:rPr>
+              <a:t>주요</a:t>
+            </a:r>
+            <a:r>
+              <a:rPr sz="1400" b="1" i="0" dirty="0">
+                <a:solidFill>
+                  <a:srgbClr val="000000"/>
+                </a:solidFill>
+                <a:latin typeface="맑은 고딕"/>
+              </a:rPr>
+              <a:t> </a:t>
+            </a:r>
+            <a:r>
+              <a:rPr sz="1400" b="1" i="0" dirty="0" err="1">
+                <a:solidFill>
+                  <a:srgbClr val="000000"/>
+                </a:solidFill>
+                <a:latin typeface="맑은 고딕"/>
+              </a:rPr>
+              <a:t>분석</a:t>
+            </a:r>
+            <a:r>
+              <a:rPr sz="1400" b="1" i="0" dirty="0">
+                <a:solidFill>
+                  <a:srgbClr val="000000"/>
+                </a:solidFill>
+                <a:latin typeface="맑은 고딕"/>
+              </a:rPr>
+              <a:t>]</a:t>
             </a:r>
           </a:p>
           <a:p>
@@ -9782,13 +11060,355 @@
               </a:spcBef>
             </a:pPr>
             <a:r>
-              <a:rPr sz="1300" b="0" i="0">
-                <a:solidFill>
-                  <a:srgbClr val="000000"/>
-                </a:solidFill>
-                <a:latin typeface="맑은 고딕"/>
-              </a:rPr>
-              <a:t>[–36, –1]월 구간에서 선형 사전 추세 추출; CAR = [–12, +24] 구간 KOSPI–TOPIX 스프레드의 누적 비정상 변화. 포화 설계 → 표준오차 미정의. 결과는 기술적 분석에 한함.</a:t>
+              <a:rPr sz="1300" b="0" i="0" dirty="0">
+                <a:solidFill>
+                  <a:srgbClr val="000000"/>
+                </a:solidFill>
+                <a:latin typeface="맑은 고딕"/>
+              </a:rPr>
+              <a:t>[–36, –1]</a:t>
+            </a:r>
+            <a:r>
+              <a:rPr sz="1300" b="0" i="0" dirty="0" err="1">
+                <a:solidFill>
+                  <a:srgbClr val="000000"/>
+                </a:solidFill>
+                <a:latin typeface="맑은 고딕"/>
+              </a:rPr>
+              <a:t>월</a:t>
+            </a:r>
+            <a:r>
+              <a:rPr sz="1300" b="0" i="0" dirty="0">
+                <a:solidFill>
+                  <a:srgbClr val="000000"/>
+                </a:solidFill>
+                <a:latin typeface="맑은 고딕"/>
+              </a:rPr>
+              <a:t> </a:t>
+            </a:r>
+            <a:r>
+              <a:rPr sz="1300" b="0" i="0" dirty="0" err="1">
+                <a:solidFill>
+                  <a:srgbClr val="000000"/>
+                </a:solidFill>
+                <a:latin typeface="맑은 고딕"/>
+              </a:rPr>
+              <a:t>구간에서</a:t>
+            </a:r>
+            <a:r>
+              <a:rPr sz="1300" b="0" i="0" dirty="0">
+                <a:solidFill>
+                  <a:srgbClr val="000000"/>
+                </a:solidFill>
+                <a:latin typeface="맑은 고딕"/>
+              </a:rPr>
+              <a:t> </a:t>
+            </a:r>
+            <a:r>
+              <a:rPr sz="1300" b="0" i="0" dirty="0" err="1">
+                <a:solidFill>
+                  <a:srgbClr val="000000"/>
+                </a:solidFill>
+                <a:latin typeface="맑은 고딕"/>
+              </a:rPr>
+              <a:t>선형</a:t>
+            </a:r>
+            <a:r>
+              <a:rPr sz="1300" b="0" i="0" dirty="0">
+                <a:solidFill>
+                  <a:srgbClr val="000000"/>
+                </a:solidFill>
+                <a:latin typeface="맑은 고딕"/>
+              </a:rPr>
+              <a:t> </a:t>
+            </a:r>
+            <a:r>
+              <a:rPr sz="1300" b="0" i="0" dirty="0" err="1">
+                <a:solidFill>
+                  <a:srgbClr val="000000"/>
+                </a:solidFill>
+                <a:latin typeface="맑은 고딕"/>
+              </a:rPr>
+              <a:t>사전</a:t>
+            </a:r>
+            <a:r>
+              <a:rPr sz="1300" b="0" i="0" dirty="0">
+                <a:solidFill>
+                  <a:srgbClr val="000000"/>
+                </a:solidFill>
+                <a:latin typeface="맑은 고딕"/>
+              </a:rPr>
+              <a:t> </a:t>
+            </a:r>
+            <a:r>
+              <a:rPr sz="1300" b="0" i="0" dirty="0" err="1">
+                <a:solidFill>
+                  <a:srgbClr val="000000"/>
+                </a:solidFill>
+                <a:latin typeface="맑은 고딕"/>
+              </a:rPr>
+              <a:t>추세</a:t>
+            </a:r>
+            <a:r>
+              <a:rPr sz="1300" b="0" i="0" dirty="0">
+                <a:solidFill>
+                  <a:srgbClr val="000000"/>
+                </a:solidFill>
+                <a:latin typeface="맑은 고딕"/>
+              </a:rPr>
+              <a:t> </a:t>
+            </a:r>
+            <a:r>
+              <a:rPr sz="1300" b="0" i="0" dirty="0" err="1">
+                <a:solidFill>
+                  <a:srgbClr val="000000"/>
+                </a:solidFill>
+                <a:latin typeface="맑은 고딕"/>
+              </a:rPr>
+              <a:t>추출</a:t>
+            </a:r>
+            <a:r>
+              <a:rPr sz="1300" b="0" i="0" dirty="0">
+                <a:solidFill>
+                  <a:srgbClr val="000000"/>
+                </a:solidFill>
+                <a:latin typeface="맑은 고딕"/>
+              </a:rPr>
+              <a:t>; CAR = [–12, +24] </a:t>
+            </a:r>
+            <a:r>
+              <a:rPr sz="1300" b="0" i="0" dirty="0" err="1">
+                <a:solidFill>
+                  <a:srgbClr val="000000"/>
+                </a:solidFill>
+                <a:latin typeface="맑은 고딕"/>
+              </a:rPr>
+              <a:t>구간</a:t>
+            </a:r>
+            <a:r>
+              <a:rPr sz="1300" b="0" i="0" dirty="0">
+                <a:solidFill>
+                  <a:srgbClr val="000000"/>
+                </a:solidFill>
+                <a:latin typeface="맑은 고딕"/>
+              </a:rPr>
+              <a:t> KOSPI–TOPIX </a:t>
+            </a:r>
+            <a:r>
+              <a:rPr sz="1300" b="0" i="0" dirty="0" err="1">
+                <a:solidFill>
+                  <a:srgbClr val="000000"/>
+                </a:solidFill>
+                <a:latin typeface="맑은 고딕"/>
+              </a:rPr>
+              <a:t>스프레드의</a:t>
+            </a:r>
+            <a:r>
+              <a:rPr sz="1300" b="0" i="0" dirty="0">
+                <a:solidFill>
+                  <a:srgbClr val="000000"/>
+                </a:solidFill>
+                <a:latin typeface="맑은 고딕"/>
+              </a:rPr>
+              <a:t> </a:t>
+            </a:r>
+            <a:r>
+              <a:rPr sz="1300" b="0" i="0" dirty="0" err="1">
+                <a:solidFill>
+                  <a:srgbClr val="000000"/>
+                </a:solidFill>
+                <a:latin typeface="맑은 고딕"/>
+              </a:rPr>
+              <a:t>누적</a:t>
+            </a:r>
+            <a:r>
+              <a:rPr sz="1300" b="0" i="0" dirty="0">
+                <a:solidFill>
+                  <a:srgbClr val="000000"/>
+                </a:solidFill>
+                <a:latin typeface="맑은 고딕"/>
+              </a:rPr>
+              <a:t> </a:t>
+            </a:r>
+            <a:r>
+              <a:rPr sz="1300" b="0" i="0" dirty="0" err="1">
+                <a:solidFill>
+                  <a:srgbClr val="000000"/>
+                </a:solidFill>
+                <a:latin typeface="맑은 고딕"/>
+              </a:rPr>
+              <a:t>비정상</a:t>
+            </a:r>
+            <a:r>
+              <a:rPr sz="1300" b="0" i="0" dirty="0">
+                <a:solidFill>
+                  <a:srgbClr val="000000"/>
+                </a:solidFill>
+                <a:latin typeface="맑은 고딕"/>
+              </a:rPr>
+              <a:t> </a:t>
+            </a:r>
+            <a:r>
+              <a:rPr sz="1300" b="0" i="0" dirty="0" err="1">
+                <a:solidFill>
+                  <a:srgbClr val="000000"/>
+                </a:solidFill>
+                <a:latin typeface="맑은 고딕"/>
+              </a:rPr>
+              <a:t>변화</a:t>
+            </a:r>
+            <a:r>
+              <a:rPr sz="1300" b="0" i="0" dirty="0">
+                <a:solidFill>
+                  <a:srgbClr val="000000"/>
+                </a:solidFill>
+                <a:latin typeface="맑은 고딕"/>
+              </a:rPr>
+              <a:t>. </a:t>
+            </a:r>
+            <a:r>
+              <a:rPr sz="1300" b="0" i="0" dirty="0" err="1">
+                <a:solidFill>
+                  <a:srgbClr val="000000"/>
+                </a:solidFill>
+                <a:latin typeface="맑은 고딕"/>
+              </a:rPr>
+              <a:t>포화</a:t>
+            </a:r>
+            <a:r>
+              <a:rPr sz="1300" b="0" i="0" dirty="0">
+                <a:solidFill>
+                  <a:srgbClr val="000000"/>
+                </a:solidFill>
+                <a:latin typeface="맑은 고딕"/>
+              </a:rPr>
+              <a:t> </a:t>
+            </a:r>
+            <a:r>
+              <a:rPr sz="1300" b="0" i="0" dirty="0" err="1">
+                <a:solidFill>
+                  <a:srgbClr val="000000"/>
+                </a:solidFill>
+                <a:latin typeface="맑은 고딕"/>
+              </a:rPr>
+              <a:t>설계</a:t>
+            </a:r>
+            <a:r>
+              <a:rPr sz="1300" b="0" i="0" dirty="0">
+                <a:solidFill>
+                  <a:srgbClr val="000000"/>
+                </a:solidFill>
+                <a:latin typeface="맑은 고딕"/>
+              </a:rPr>
+              <a:t> → </a:t>
+            </a:r>
+            <a:r>
+              <a:rPr sz="1300" b="0" i="0" dirty="0" err="1">
+                <a:solidFill>
+                  <a:srgbClr val="000000"/>
+                </a:solidFill>
+                <a:latin typeface="맑은 고딕"/>
+              </a:rPr>
+              <a:t>표준오차</a:t>
+            </a:r>
+            <a:r>
+              <a:rPr sz="1300" b="0" i="0" dirty="0">
+                <a:solidFill>
+                  <a:srgbClr val="000000"/>
+                </a:solidFill>
+                <a:latin typeface="맑은 고딕"/>
+              </a:rPr>
+              <a:t> </a:t>
+            </a:r>
+            <a:r>
+              <a:rPr sz="1300" b="0" i="0" dirty="0" err="1">
+                <a:solidFill>
+                  <a:srgbClr val="000000"/>
+                </a:solidFill>
+                <a:latin typeface="맑은 고딕"/>
+              </a:rPr>
+              <a:t>미정의</a:t>
+            </a:r>
+            <a:r>
+              <a:rPr sz="1300" b="0" i="0" dirty="0">
+                <a:solidFill>
+                  <a:srgbClr val="000000"/>
+                </a:solidFill>
+                <a:latin typeface="맑은 고딕"/>
+              </a:rPr>
+              <a:t>. </a:t>
+            </a:r>
+            <a:r>
+              <a:rPr sz="1300" b="0" i="0" dirty="0" err="1">
+                <a:solidFill>
+                  <a:srgbClr val="000000"/>
+                </a:solidFill>
+                <a:latin typeface="맑은 고딕"/>
+              </a:rPr>
+              <a:t>결과는</a:t>
+            </a:r>
+            <a:r>
+              <a:rPr sz="1300" b="0" i="0" dirty="0">
+                <a:solidFill>
+                  <a:srgbClr val="000000"/>
+                </a:solidFill>
+                <a:latin typeface="맑은 고딕"/>
+              </a:rPr>
+              <a:t> </a:t>
+            </a:r>
+            <a:r>
+              <a:rPr sz="1300" b="0" i="0" dirty="0" err="1">
+                <a:solidFill>
+                  <a:srgbClr val="000000"/>
+                </a:solidFill>
+                <a:latin typeface="맑은 고딕"/>
+              </a:rPr>
+              <a:t>기술적</a:t>
+            </a:r>
+            <a:r>
+              <a:rPr sz="1300" b="0" i="0" dirty="0">
+                <a:solidFill>
+                  <a:srgbClr val="000000"/>
+                </a:solidFill>
+                <a:latin typeface="맑은 고딕"/>
+              </a:rPr>
+              <a:t> </a:t>
+            </a:r>
+            <a:r>
+              <a:rPr sz="1300" b="0" i="0" dirty="0" err="1">
+                <a:solidFill>
+                  <a:srgbClr val="000000"/>
+                </a:solidFill>
+                <a:latin typeface="맑은 고딕"/>
+              </a:rPr>
+              <a:t>분석에</a:t>
+            </a:r>
+            <a:r>
+              <a:rPr sz="1300" b="0" i="0" dirty="0">
+                <a:solidFill>
+                  <a:srgbClr val="000000"/>
+                </a:solidFill>
+                <a:latin typeface="맑은 고딕"/>
+              </a:rPr>
+              <a:t> </a:t>
+            </a:r>
+            <a:r>
+              <a:rPr sz="1300" b="0" i="0" dirty="0" err="1">
+                <a:solidFill>
+                  <a:srgbClr val="000000"/>
+                </a:solidFill>
+                <a:latin typeface="맑은 고딕"/>
+              </a:rPr>
+              <a:t>한함</a:t>
+            </a:r>
+            <a:r>
+              <a:rPr sz="1300" b="0" i="0" dirty="0">
+                <a:solidFill>
+                  <a:srgbClr val="000000"/>
+                </a:solidFill>
+                <a:latin typeface="맑은 고딕"/>
+              </a:rPr>
+              <a:t>.</a:t>
             </a:r>
           </a:p>
           <a:p>
@@ -9798,13 +11418,58 @@
               </a:spcBef>
             </a:pPr>
             <a:r>
-              <a:rPr sz="1400" b="1" i="0">
-                <a:solidFill>
-                  <a:srgbClr val="000000"/>
-                </a:solidFill>
-                <a:latin typeface="맑은 고딕"/>
-              </a:rPr>
-              <a:t>패널 OLS  [보완 분석]</a:t>
+              <a:rPr sz="1400" b="1" i="0" dirty="0" err="1">
+                <a:solidFill>
+                  <a:srgbClr val="000000"/>
+                </a:solidFill>
+                <a:latin typeface="맑은 고딕"/>
+              </a:rPr>
+              <a:t>패널</a:t>
+            </a:r>
+            <a:r>
+              <a:rPr sz="1400" b="1" i="0" dirty="0">
+                <a:solidFill>
+                  <a:srgbClr val="000000"/>
+                </a:solidFill>
+                <a:latin typeface="맑은 고딕"/>
+              </a:rPr>
+              <a:t> OLS  [</a:t>
+            </a:r>
+            <a:r>
+              <a:rPr sz="1400" b="1" i="0" dirty="0" err="1">
+                <a:solidFill>
+                  <a:srgbClr val="000000"/>
+                </a:solidFill>
+                <a:latin typeface="맑은 고딕"/>
+              </a:rPr>
+              <a:t>보완</a:t>
+            </a:r>
+            <a:r>
+              <a:rPr sz="1400" b="1" i="0" dirty="0">
+                <a:solidFill>
+                  <a:srgbClr val="000000"/>
+                </a:solidFill>
+                <a:latin typeface="맑은 고딕"/>
+              </a:rPr>
+              <a:t> </a:t>
+            </a:r>
+            <a:r>
+              <a:rPr sz="1400" b="1" i="0" dirty="0" err="1">
+                <a:solidFill>
+                  <a:srgbClr val="000000"/>
+                </a:solidFill>
+                <a:latin typeface="맑은 고딕"/>
+              </a:rPr>
+              <a:t>분석</a:t>
+            </a:r>
+            <a:r>
+              <a:rPr sz="1400" b="1" i="0" dirty="0">
+                <a:solidFill>
+                  <a:srgbClr val="000000"/>
+                </a:solidFill>
+                <a:latin typeface="맑은 고딕"/>
+              </a:rPr>
+              <a:t>]</a:t>
             </a:r>
           </a:p>
           <a:p>
@@ -9814,13 +11479,328 @@
               </a:spcBef>
             </a:pPr>
             <a:r>
-              <a:rPr sz="1300" b="0" i="0">
-                <a:solidFill>
-                  <a:srgbClr val="000000"/>
-                </a:solidFill>
-                <a:latin typeface="맑은 고딕"/>
-              </a:rPr>
-              <a:t>이원 고정효과(국가 + 시간); 개혁 × 일본 교호항. 와일드 부트스트랩 p값 (Rademacher 999회 추출, N = 4 클러스터). 결과: p = 0.625 / 0.375 / 0.500 — 강건한 인과적 증거 없음.</a:t>
+              <a:rPr sz="1300" b="0" i="0" dirty="0" err="1">
+                <a:solidFill>
+                  <a:srgbClr val="000000"/>
+                </a:solidFill>
+                <a:latin typeface="맑은 고딕"/>
+              </a:rPr>
+              <a:t>이원</a:t>
+            </a:r>
+            <a:r>
+              <a:rPr sz="1300" b="0" i="0" dirty="0">
+                <a:solidFill>
+                  <a:srgbClr val="000000"/>
+                </a:solidFill>
+                <a:latin typeface="맑은 고딕"/>
+              </a:rPr>
+              <a:t> </a:t>
+            </a:r>
+            <a:r>
+              <a:rPr sz="1300" b="0" i="0" dirty="0" err="1">
+                <a:solidFill>
+                  <a:srgbClr val="000000"/>
+                </a:solidFill>
+                <a:latin typeface="맑은 고딕"/>
+              </a:rPr>
+              <a:t>고정효과</a:t>
+            </a:r>
+            <a:r>
+              <a:rPr sz="1300" b="0" i="0" dirty="0">
+                <a:solidFill>
+                  <a:srgbClr val="000000"/>
+                </a:solidFill>
+                <a:latin typeface="맑은 고딕"/>
+              </a:rPr>
+              <a:t>(</a:t>
+            </a:r>
+            <a:r>
+              <a:rPr sz="1300" b="0" i="0" dirty="0" err="1">
+                <a:solidFill>
+                  <a:srgbClr val="000000"/>
+                </a:solidFill>
+                <a:latin typeface="맑은 고딕"/>
+              </a:rPr>
+              <a:t>국가</a:t>
+            </a:r>
+            <a:r>
+              <a:rPr sz="1300" b="0" i="0" dirty="0">
+                <a:solidFill>
+                  <a:srgbClr val="000000"/>
+                </a:solidFill>
+                <a:latin typeface="맑은 고딕"/>
+              </a:rPr>
+              <a:t> + </a:t>
+            </a:r>
+            <a:r>
+              <a:rPr sz="1300" b="0" i="0" dirty="0" err="1">
+                <a:solidFill>
+                  <a:srgbClr val="000000"/>
+                </a:solidFill>
+                <a:latin typeface="맑은 고딕"/>
+              </a:rPr>
+              <a:t>시간</a:t>
+            </a:r>
+            <a:r>
+              <a:rPr sz="1300" b="0" i="0" dirty="0">
+                <a:solidFill>
+                  <a:srgbClr val="000000"/>
+                </a:solidFill>
+                <a:latin typeface="맑은 고딕"/>
+              </a:rPr>
+              <a:t>); </a:t>
+            </a:r>
+            <a:r>
+              <a:rPr sz="1300" b="0" i="0" dirty="0" err="1">
+                <a:solidFill>
+                  <a:srgbClr val="000000"/>
+                </a:solidFill>
+                <a:latin typeface="맑은 고딕"/>
+              </a:rPr>
+              <a:t>개혁</a:t>
+            </a:r>
+            <a:r>
+              <a:rPr sz="1300" b="0" i="0" dirty="0">
+                <a:solidFill>
+                  <a:srgbClr val="000000"/>
+                </a:solidFill>
+                <a:latin typeface="맑은 고딕"/>
+              </a:rPr>
+              <a:t> × </a:t>
+            </a:r>
+            <a:r>
+              <a:rPr sz="1300" b="0" i="0" dirty="0" err="1">
+                <a:solidFill>
+                  <a:srgbClr val="000000"/>
+                </a:solidFill>
+                <a:latin typeface="맑은 고딕"/>
+              </a:rPr>
+              <a:t>일본</a:t>
+            </a:r>
+            <a:r>
+              <a:rPr sz="1300" b="0" i="0" dirty="0">
+                <a:solidFill>
+                  <a:srgbClr val="000000"/>
+                </a:solidFill>
+                <a:latin typeface="맑은 고딕"/>
+              </a:rPr>
+              <a:t> </a:t>
+            </a:r>
+            <a:r>
+              <a:rPr sz="1300" b="0" i="0" dirty="0" err="1">
+                <a:solidFill>
+                  <a:srgbClr val="000000"/>
+                </a:solidFill>
+                <a:latin typeface="맑은 고딕"/>
+              </a:rPr>
+              <a:t>교호항</a:t>
+            </a:r>
+            <a:r>
+              <a:rPr sz="1300" b="0" i="0" dirty="0">
+                <a:solidFill>
+                  <a:srgbClr val="000000"/>
+                </a:solidFill>
+                <a:latin typeface="맑은 고딕"/>
+              </a:rPr>
+              <a:t>. </a:t>
+            </a:r>
+            <a:r>
+              <a:rPr sz="1300" b="0" i="0" dirty="0" err="1">
+                <a:solidFill>
+                  <a:srgbClr val="000000"/>
+                </a:solidFill>
+                <a:latin typeface="맑은 고딕"/>
+              </a:rPr>
+              <a:t>와일드</a:t>
+            </a:r>
+            <a:r>
+              <a:rPr sz="1300" b="0" i="0" dirty="0">
+                <a:solidFill>
+                  <a:srgbClr val="000000"/>
+                </a:solidFill>
+                <a:latin typeface="맑은 고딕"/>
+              </a:rPr>
+              <a:t> </a:t>
+            </a:r>
+            <a:r>
+              <a:rPr sz="1300" b="0" i="0" dirty="0" err="1">
+                <a:solidFill>
+                  <a:srgbClr val="000000"/>
+                </a:solidFill>
+                <a:latin typeface="맑은 고딕"/>
+              </a:rPr>
+              <a:t>부트스트랩</a:t>
+            </a:r>
+            <a:r>
+              <a:rPr sz="1300" b="0" i="0" dirty="0">
+                <a:solidFill>
+                  <a:srgbClr val="000000"/>
+                </a:solidFill>
+                <a:latin typeface="맑은 고딕"/>
+              </a:rPr>
+              <a:t> </a:t>
+            </a:r>
+            <a:r>
+              <a:rPr sz="1300" b="0" i="0" dirty="0" err="1">
+                <a:solidFill>
+                  <a:srgbClr val="000000"/>
+                </a:solidFill>
+                <a:latin typeface="맑은 고딕"/>
+              </a:rPr>
+              <a:t>p값</a:t>
+            </a:r>
+            <a:r>
+              <a:rPr sz="1300" b="0" i="0" dirty="0">
+                <a:solidFill>
+                  <a:srgbClr val="000000"/>
+                </a:solidFill>
+                <a:latin typeface="맑은 고딕"/>
+              </a:rPr>
+              <a:t> (Rademacher 999회 </a:t>
+            </a:r>
+            <a:r>
+              <a:rPr sz="1300" b="0" i="0" dirty="0" err="1">
+                <a:solidFill>
+                  <a:srgbClr val="000000"/>
+                </a:solidFill>
+                <a:latin typeface="맑은 고딕"/>
+              </a:rPr>
+              <a:t>추출</a:t>
+            </a:r>
+            <a:r>
+              <a:rPr sz="1300" b="0" i="0" dirty="0">
+                <a:solidFill>
+                  <a:srgbClr val="000000"/>
+                </a:solidFill>
+                <a:latin typeface="맑은 고딕"/>
+              </a:rPr>
+              <a:t>, N = 4 </a:t>
+            </a:r>
+            <a:r>
+              <a:rPr sz="1300" b="0" i="0" dirty="0" err="1">
+                <a:solidFill>
+                  <a:srgbClr val="000000"/>
+                </a:solidFill>
+                <a:latin typeface="맑은 고딕"/>
+              </a:rPr>
+              <a:t>클러스터</a:t>
+            </a:r>
+            <a:r>
+              <a:rPr sz="1300" b="0" i="0" dirty="0">
+                <a:solidFill>
+                  <a:srgbClr val="000000"/>
+                </a:solidFill>
+                <a:latin typeface="맑은 고딕"/>
+              </a:rPr>
+              <a:t>). </a:t>
+            </a:r>
+            <a:r>
+              <a:rPr sz="1300" b="0" i="0" dirty="0" err="1">
+                <a:solidFill>
+                  <a:srgbClr val="000000"/>
+                </a:solidFill>
+                <a:latin typeface="맑은 고딕"/>
+              </a:rPr>
+              <a:t>결과</a:t>
+            </a:r>
+            <a:r>
+              <a:rPr sz="1300" b="0" i="0" dirty="0">
+                <a:solidFill>
+                  <a:srgbClr val="000000"/>
+                </a:solidFill>
+                <a:latin typeface="맑은 고딕"/>
+              </a:rPr>
+              <a:t>: p = 0.625 / 0.375 / 0.500</a:t>
+            </a:r>
+            <a:r>
+              <a:rPr lang="ko-KR" altLang="en-US" sz="1300" dirty="0">
+                <a:solidFill>
+                  <a:srgbClr val="000000"/>
+                </a:solidFill>
+                <a:latin typeface="맑은 고딕"/>
+              </a:rPr>
+              <a:t>로 인하여</a:t>
+            </a:r>
+            <a:r>
+              <a:rPr sz="1300" b="0" i="0" dirty="0">
+                <a:solidFill>
+                  <a:srgbClr val="000000"/>
+                </a:solidFill>
+                <a:latin typeface="맑은 고딕"/>
+              </a:rPr>
+              <a:t> </a:t>
+            </a:r>
+            <a:r>
+              <a:rPr sz="1300" b="0" i="0" dirty="0" err="1">
+                <a:solidFill>
+                  <a:srgbClr val="000000"/>
+                </a:solidFill>
+                <a:latin typeface="맑은 고딕"/>
+              </a:rPr>
+              <a:t>강건한</a:t>
+            </a:r>
+            <a:r>
+              <a:rPr sz="1300" b="0" i="0" dirty="0">
+                <a:solidFill>
+                  <a:srgbClr val="000000"/>
+                </a:solidFill>
+                <a:latin typeface="맑은 고딕"/>
+              </a:rPr>
+              <a:t> </a:t>
+            </a:r>
+            <a:r>
+              <a:rPr sz="1300" b="0" i="0" dirty="0" err="1">
+                <a:solidFill>
+                  <a:srgbClr val="000000"/>
+                </a:solidFill>
+                <a:latin typeface="맑은 고딕"/>
+              </a:rPr>
+              <a:t>인과적</a:t>
+            </a:r>
+            <a:r>
+              <a:rPr sz="1300" b="0" i="0" dirty="0">
+                <a:solidFill>
+                  <a:srgbClr val="000000"/>
+                </a:solidFill>
+                <a:latin typeface="맑은 고딕"/>
+              </a:rPr>
+              <a:t> </a:t>
+            </a:r>
+            <a:r>
+              <a:rPr sz="1300" b="0" i="0" dirty="0" err="1">
+                <a:solidFill>
+                  <a:srgbClr val="000000"/>
+                </a:solidFill>
+                <a:latin typeface="맑은 고딕"/>
+              </a:rPr>
+              <a:t>증거</a:t>
+            </a:r>
+            <a:r>
+              <a:rPr sz="1300" b="0" i="0" dirty="0">
+                <a:solidFill>
+                  <a:srgbClr val="000000"/>
+                </a:solidFill>
+                <a:latin typeface="맑은 고딕"/>
+              </a:rPr>
+              <a:t> </a:t>
+            </a:r>
+            <a:r>
+              <a:rPr sz="1300" b="0" i="0" dirty="0" err="1">
+                <a:solidFill>
+                  <a:srgbClr val="000000"/>
+                </a:solidFill>
+                <a:latin typeface="맑은 고딕"/>
+              </a:rPr>
+              <a:t>없음</a:t>
+            </a:r>
+            <a:r>
+              <a:rPr sz="1300" b="0" i="0" dirty="0">
+                <a:solidFill>
+                  <a:srgbClr val="000000"/>
+                </a:solidFill>
+                <a:latin typeface="맑은 고딕"/>
+              </a:rPr>
+              <a:t>.</a:t>
             </a:r>
           </a:p>
           <a:p>
@@ -9830,13 +11810,40 @@
               </a:spcBef>
             </a:pPr>
             <a:r>
-              <a:rPr sz="1400" b="1" i="0">
-                <a:solidFill>
-                  <a:srgbClr val="000000"/>
-                </a:solidFill>
-                <a:latin typeface="맑은 고딕"/>
-              </a:rPr>
-              <a:t>합성통제법  [2023년 한정]</a:t>
+              <a:rPr sz="1400" b="1" i="0" dirty="0" err="1">
+                <a:solidFill>
+                  <a:srgbClr val="000000"/>
+                </a:solidFill>
+                <a:latin typeface="맑은 고딕"/>
+              </a:rPr>
+              <a:t>합성통제법</a:t>
+            </a:r>
+            <a:r>
+              <a:rPr sz="1400" b="1" i="0" dirty="0">
+                <a:solidFill>
+                  <a:srgbClr val="000000"/>
+                </a:solidFill>
+                <a:latin typeface="맑은 고딕"/>
+              </a:rPr>
+              <a:t>  [2023년 </a:t>
+            </a:r>
+            <a:r>
+              <a:rPr sz="1400" b="1" i="0" dirty="0" err="1">
+                <a:solidFill>
+                  <a:srgbClr val="000000"/>
+                </a:solidFill>
+                <a:latin typeface="맑은 고딕"/>
+              </a:rPr>
+              <a:t>한정</a:t>
+            </a:r>
+            <a:r>
+              <a:rPr sz="1400" b="1" i="0" dirty="0">
+                <a:solidFill>
+                  <a:srgbClr val="000000"/>
+                </a:solidFill>
+                <a:latin typeface="맑은 고딕"/>
+              </a:rPr>
+              <a:t>]</a:t>
             </a:r>
           </a:p>
           <a:p>
@@ -9846,13 +11853,211 @@
               </a:spcBef>
             </a:pPr>
             <a:r>
-              <a:rPr sz="1300" b="0" i="0">
-                <a:solidFill>
-                  <a:srgbClr val="000000"/>
-                </a:solidFill>
-                <a:latin typeface="맑은 고딕"/>
-              </a:rPr>
-              <a:t>역내 EM 비교군에 대한 디민(demeaned) PBR 기반 합성통제. MSCI EM 아시아에 전체 가중치 배분(w = 1.0); 처치 전 RMSPE = 0.1451. 사후 격차는 확대되지 않고 점진적으로 축소.</a:t>
+              <a:rPr sz="1300" b="0" i="0" dirty="0" err="1">
+                <a:solidFill>
+                  <a:srgbClr val="000000"/>
+                </a:solidFill>
+                <a:latin typeface="맑은 고딕"/>
+              </a:rPr>
+              <a:t>역내</a:t>
+            </a:r>
+            <a:r>
+              <a:rPr sz="1300" b="0" i="0" dirty="0">
+                <a:solidFill>
+                  <a:srgbClr val="000000"/>
+                </a:solidFill>
+                <a:latin typeface="맑은 고딕"/>
+              </a:rPr>
+              <a:t> EM </a:t>
+            </a:r>
+            <a:r>
+              <a:rPr sz="1300" b="0" i="0" dirty="0" err="1">
+                <a:solidFill>
+                  <a:srgbClr val="000000"/>
+                </a:solidFill>
+                <a:latin typeface="맑은 고딕"/>
+              </a:rPr>
+              <a:t>비교군에</a:t>
+            </a:r>
+            <a:r>
+              <a:rPr sz="1300" b="0" i="0" dirty="0">
+                <a:solidFill>
+                  <a:srgbClr val="000000"/>
+                </a:solidFill>
+                <a:latin typeface="맑은 고딕"/>
+              </a:rPr>
+              <a:t> </a:t>
+            </a:r>
+            <a:r>
+              <a:rPr sz="1300" b="0" i="0" dirty="0" err="1">
+                <a:solidFill>
+                  <a:srgbClr val="000000"/>
+                </a:solidFill>
+                <a:latin typeface="맑은 고딕"/>
+              </a:rPr>
+              <a:t>대한</a:t>
+            </a:r>
+            <a:r>
+              <a:rPr lang="ko-KR" altLang="en-US" sz="1300" dirty="0">
+                <a:solidFill>
+                  <a:srgbClr val="000000"/>
+                </a:solidFill>
+                <a:latin typeface="맑은 고딕"/>
+              </a:rPr>
+              <a:t> </a:t>
+            </a:r>
+            <a:r>
+              <a:rPr sz="1300" b="0" i="0" dirty="0">
+                <a:solidFill>
+                  <a:srgbClr val="000000"/>
+                </a:solidFill>
+                <a:latin typeface="맑은 고딕"/>
+              </a:rPr>
+              <a:t>demeaned PBR </a:t>
+            </a:r>
+            <a:r>
+              <a:rPr sz="1300" b="0" i="0" dirty="0" err="1">
+                <a:solidFill>
+                  <a:srgbClr val="000000"/>
+                </a:solidFill>
+                <a:latin typeface="맑은 고딕"/>
+              </a:rPr>
+              <a:t>기반</a:t>
+            </a:r>
+            <a:r>
+              <a:rPr sz="1300" b="0" i="0" dirty="0">
+                <a:solidFill>
+                  <a:srgbClr val="000000"/>
+                </a:solidFill>
+                <a:latin typeface="맑은 고딕"/>
+              </a:rPr>
+              <a:t> </a:t>
+            </a:r>
+            <a:r>
+              <a:rPr sz="1300" b="0" i="0" dirty="0" err="1">
+                <a:solidFill>
+                  <a:srgbClr val="000000"/>
+                </a:solidFill>
+                <a:latin typeface="맑은 고딕"/>
+              </a:rPr>
+              <a:t>합성통제</a:t>
+            </a:r>
+            <a:r>
+              <a:rPr sz="1300" b="0" i="0" dirty="0">
+                <a:solidFill>
+                  <a:srgbClr val="000000"/>
+                </a:solidFill>
+                <a:latin typeface="맑은 고딕"/>
+              </a:rPr>
+              <a:t>. MSCI EM </a:t>
+            </a:r>
+            <a:r>
+              <a:rPr sz="1300" b="0" i="0" dirty="0" err="1">
+                <a:solidFill>
+                  <a:srgbClr val="000000"/>
+                </a:solidFill>
+                <a:latin typeface="맑은 고딕"/>
+              </a:rPr>
+              <a:t>아시아에</a:t>
+            </a:r>
+            <a:r>
+              <a:rPr sz="1300" b="0" i="0" dirty="0">
+                <a:solidFill>
+                  <a:srgbClr val="000000"/>
+                </a:solidFill>
+                <a:latin typeface="맑은 고딕"/>
+              </a:rPr>
+              <a:t> </a:t>
+            </a:r>
+            <a:r>
+              <a:rPr sz="1300" b="0" i="0" dirty="0" err="1">
+                <a:solidFill>
+                  <a:srgbClr val="000000"/>
+                </a:solidFill>
+                <a:latin typeface="맑은 고딕"/>
+              </a:rPr>
+              <a:t>전체</a:t>
+            </a:r>
+            <a:r>
+              <a:rPr sz="1300" b="0" i="0" dirty="0">
+                <a:solidFill>
+                  <a:srgbClr val="000000"/>
+                </a:solidFill>
+                <a:latin typeface="맑은 고딕"/>
+              </a:rPr>
+              <a:t> </a:t>
+            </a:r>
+            <a:r>
+              <a:rPr sz="1300" b="0" i="0" dirty="0" err="1">
+                <a:solidFill>
+                  <a:srgbClr val="000000"/>
+                </a:solidFill>
+                <a:latin typeface="맑은 고딕"/>
+              </a:rPr>
+              <a:t>가중치</a:t>
+            </a:r>
+            <a:r>
+              <a:rPr sz="1300" b="0" i="0" dirty="0">
+                <a:solidFill>
+                  <a:srgbClr val="000000"/>
+                </a:solidFill>
+                <a:latin typeface="맑은 고딕"/>
+              </a:rPr>
+              <a:t> </a:t>
+            </a:r>
+            <a:r>
+              <a:rPr sz="1300" b="0" i="0" dirty="0" err="1">
+                <a:solidFill>
+                  <a:srgbClr val="000000"/>
+                </a:solidFill>
+                <a:latin typeface="맑은 고딕"/>
+              </a:rPr>
+              <a:t>배분</a:t>
+            </a:r>
+            <a:r>
+              <a:rPr sz="1300" b="0" i="0" dirty="0">
+                <a:solidFill>
+                  <a:srgbClr val="000000"/>
+                </a:solidFill>
+                <a:latin typeface="맑은 고딕"/>
+              </a:rPr>
+              <a:t>; </a:t>
+            </a:r>
+            <a:r>
+              <a:rPr sz="1300" b="0" i="0" dirty="0" err="1">
+                <a:solidFill>
+                  <a:srgbClr val="000000"/>
+                </a:solidFill>
+                <a:latin typeface="맑은 고딕"/>
+              </a:rPr>
+              <a:t>처치</a:t>
+            </a:r>
+            <a:r>
+              <a:rPr sz="1300" b="0" i="0" dirty="0">
+                <a:solidFill>
+                  <a:srgbClr val="000000"/>
+                </a:solidFill>
+                <a:latin typeface="맑은 고딕"/>
+              </a:rPr>
+              <a:t> </a:t>
+            </a:r>
+            <a:r>
+              <a:rPr sz="1300" b="0" i="0" dirty="0" err="1">
+                <a:solidFill>
+                  <a:srgbClr val="000000"/>
+                </a:solidFill>
+                <a:latin typeface="맑은 고딕"/>
+              </a:rPr>
+              <a:t>전</a:t>
+            </a:r>
+            <a:r>
+              <a:rPr sz="1300" b="0" i="0" dirty="0">
+                <a:solidFill>
+                  <a:srgbClr val="000000"/>
+                </a:solidFill>
+                <a:latin typeface="맑은 고딕"/>
+              </a:rPr>
+              <a:t> RMSPE = 0.1451.</a:t>
             </a:r>
           </a:p>
         </p:txBody>
@@ -11789,7 +13994,7 @@
         <p:spPr>
           <a:xfrm>
             <a:off x="6309360" y="1234440"/>
-            <a:ext cx="5577840" cy="3308598"/>
+            <a:ext cx="5577840" cy="2549416"/>
           </a:xfrm>
           <a:prstGeom prst="rect">
             <a:avLst/>
@@ -12554,347 +14759,6 @@
               <a:rPr sz="1400" dirty="0">
                 <a:solidFill>
                   <a:srgbClr val="000000"/>
-                </a:solidFill>
-                <a:latin typeface="맑은 고딕"/>
-              </a:rPr>
-              <a:t>.</a:t>
-            </a:r>
-          </a:p>
-          <a:p>
-            <a:pPr>
-              <a:spcBef>
-                <a:spcPts val="800"/>
-              </a:spcBef>
-            </a:pPr>
-            <a:r>
-              <a:rPr sz="1200" b="0" i="1" dirty="0">
-                <a:solidFill>
-                  <a:srgbClr val="595959"/>
-                </a:solidFill>
-                <a:latin typeface="맑은 고딕"/>
-              </a:rPr>
-              <a:t>
-</a:t>
-            </a:r>
-            <a:r>
-              <a:rPr sz="1200" b="0" i="1" dirty="0" err="1">
-                <a:solidFill>
-                  <a:srgbClr val="595959"/>
-                </a:solidFill>
-                <a:latin typeface="맑은 고딕"/>
-              </a:rPr>
-              <a:t>주의</a:t>
-            </a:r>
-            <a:r>
-              <a:rPr sz="1200" b="0" i="1" dirty="0">
-                <a:solidFill>
-                  <a:srgbClr val="595959"/>
-                </a:solidFill>
-                <a:latin typeface="맑은 고딕"/>
-              </a:rPr>
-              <a:t>: </a:t>
-            </a:r>
-            <a:r>
-              <a:rPr sz="1200" b="0" i="1" dirty="0" err="1">
-                <a:solidFill>
-                  <a:srgbClr val="595959"/>
-                </a:solidFill>
-                <a:latin typeface="맑은 고딕"/>
-              </a:rPr>
-              <a:t>TOPIX의</a:t>
-            </a:r>
-            <a:r>
-              <a:rPr sz="1200" b="0" i="1" dirty="0">
-                <a:solidFill>
-                  <a:srgbClr val="595959"/>
-                </a:solidFill>
-                <a:latin typeface="맑은 고딕"/>
-              </a:rPr>
-              <a:t> </a:t>
-            </a:r>
-            <a:r>
-              <a:rPr sz="1200" b="0" i="1" dirty="0" err="1">
-                <a:solidFill>
-                  <a:srgbClr val="595959"/>
-                </a:solidFill>
-                <a:latin typeface="맑은 고딕"/>
-              </a:rPr>
-              <a:t>절대</a:t>
-            </a:r>
-            <a:r>
-              <a:rPr sz="1200" b="0" i="1" dirty="0">
-                <a:solidFill>
-                  <a:srgbClr val="595959"/>
-                </a:solidFill>
-                <a:latin typeface="맑은 고딕"/>
-              </a:rPr>
-              <a:t> PBR </a:t>
-            </a:r>
-            <a:r>
-              <a:rPr sz="1200" b="0" i="1" dirty="0" err="1">
-                <a:solidFill>
-                  <a:srgbClr val="595959"/>
-                </a:solidFill>
-                <a:latin typeface="맑은 고딕"/>
-              </a:rPr>
-              <a:t>상승은</a:t>
-            </a:r>
-            <a:r>
-              <a:rPr sz="1200" b="0" i="1" dirty="0">
-                <a:solidFill>
-                  <a:srgbClr val="595959"/>
-                </a:solidFill>
-                <a:latin typeface="맑은 고딕"/>
-              </a:rPr>
-              <a:t> </a:t>
-            </a:r>
-            <a:r>
-              <a:rPr sz="1200" b="0" i="1" dirty="0" err="1">
-                <a:solidFill>
-                  <a:srgbClr val="595959"/>
-                </a:solidFill>
-                <a:latin typeface="맑은 고딕"/>
-              </a:rPr>
-              <a:t>엔화</a:t>
-            </a:r>
-            <a:r>
-              <a:rPr sz="1200" b="0" i="1" dirty="0">
-                <a:solidFill>
-                  <a:srgbClr val="595959"/>
-                </a:solidFill>
-                <a:latin typeface="맑은 고딕"/>
-              </a:rPr>
-              <a:t> </a:t>
-            </a:r>
-            <a:r>
-              <a:rPr sz="1200" b="0" i="1" dirty="0" err="1">
-                <a:solidFill>
-                  <a:srgbClr val="595959"/>
-                </a:solidFill>
-                <a:latin typeface="맑은 고딕"/>
-              </a:rPr>
-              <a:t>약세</a:t>
-            </a:r>
-            <a:r>
-              <a:rPr sz="1200" b="0" i="1" dirty="0">
-                <a:solidFill>
-                  <a:srgbClr val="595959"/>
-                </a:solidFill>
-                <a:latin typeface="맑은 고딕"/>
-              </a:rPr>
-              <a:t> </a:t>
-            </a:r>
-            <a:r>
-              <a:rPr sz="1200" b="0" i="1" dirty="0" err="1">
-                <a:solidFill>
-                  <a:srgbClr val="595959"/>
-                </a:solidFill>
-                <a:latin typeface="맑은 고딕"/>
-              </a:rPr>
-              <a:t>및</a:t>
-            </a:r>
-            <a:r>
-              <a:rPr sz="1200" b="0" i="1" dirty="0">
-                <a:solidFill>
-                  <a:srgbClr val="595959"/>
-                </a:solidFill>
-                <a:latin typeface="맑은 고딕"/>
-              </a:rPr>
-              <a:t> </a:t>
-            </a:r>
-            <a:r>
-              <a:rPr sz="1200" b="0" i="1" dirty="0" err="1">
-                <a:solidFill>
-                  <a:srgbClr val="595959"/>
-                </a:solidFill>
-                <a:latin typeface="맑은 고딕"/>
-              </a:rPr>
-              <a:t>역내</a:t>
-            </a:r>
-            <a:r>
-              <a:rPr sz="1200" b="0" i="1" dirty="0">
-                <a:solidFill>
-                  <a:srgbClr val="595959"/>
-                </a:solidFill>
-                <a:latin typeface="맑은 고딕"/>
-              </a:rPr>
-              <a:t> EM </a:t>
-            </a:r>
-            <a:r>
-              <a:rPr sz="1200" b="0" i="1" dirty="0" err="1">
-                <a:solidFill>
-                  <a:srgbClr val="595959"/>
-                </a:solidFill>
-                <a:latin typeface="맑은 고딕"/>
-              </a:rPr>
-              <a:t>모멘텀을</a:t>
-            </a:r>
-            <a:r>
-              <a:rPr sz="1200" b="0" i="1" dirty="0">
-                <a:solidFill>
-                  <a:srgbClr val="595959"/>
-                </a:solidFill>
-                <a:latin typeface="맑은 고딕"/>
-              </a:rPr>
-              <a:t> </a:t>
-            </a:r>
-            <a:r>
-              <a:rPr sz="1200" b="0" i="1" dirty="0" err="1">
-                <a:solidFill>
-                  <a:srgbClr val="595959"/>
-                </a:solidFill>
-                <a:latin typeface="맑은 고딕"/>
-              </a:rPr>
-              <a:t>반영할</a:t>
-            </a:r>
-            <a:r>
-              <a:rPr sz="1200" b="0" i="1" dirty="0">
-                <a:solidFill>
-                  <a:srgbClr val="595959"/>
-                </a:solidFill>
-                <a:latin typeface="맑은 고딕"/>
-              </a:rPr>
-              <a:t> </a:t>
-            </a:r>
-            <a:r>
-              <a:rPr sz="1200" b="0" i="1" dirty="0" err="1">
-                <a:solidFill>
-                  <a:srgbClr val="595959"/>
-                </a:solidFill>
-                <a:latin typeface="맑은 고딕"/>
-              </a:rPr>
-              <a:t>수</a:t>
-            </a:r>
-            <a:r>
-              <a:rPr sz="1200" b="0" i="1" dirty="0">
-                <a:solidFill>
-                  <a:srgbClr val="595959"/>
-                </a:solidFill>
-                <a:latin typeface="맑은 고딕"/>
-              </a:rPr>
-              <a:t> </a:t>
-            </a:r>
-            <a:r>
-              <a:rPr sz="1200" b="0" i="1" dirty="0" err="1">
-                <a:solidFill>
-                  <a:srgbClr val="595959"/>
-                </a:solidFill>
-                <a:latin typeface="맑은 고딕"/>
-              </a:rPr>
-              <a:t>있으며</a:t>
-            </a:r>
-            <a:r>
-              <a:rPr sz="1200" b="0" i="1" dirty="0">
-                <a:solidFill>
-                  <a:srgbClr val="595959"/>
-                </a:solidFill>
-                <a:latin typeface="맑은 고딕"/>
-              </a:rPr>
-              <a:t>, </a:t>
-            </a:r>
-            <a:r>
-              <a:rPr sz="1200" b="0" i="1" dirty="0" err="1">
-                <a:solidFill>
-                  <a:srgbClr val="595959"/>
-                </a:solidFill>
-                <a:latin typeface="맑은 고딕"/>
-              </a:rPr>
-              <a:t>순수한</a:t>
-            </a:r>
-            <a:r>
-              <a:rPr sz="1200" b="0" i="1" dirty="0">
-                <a:solidFill>
-                  <a:srgbClr val="595959"/>
-                </a:solidFill>
-                <a:latin typeface="맑은 고딕"/>
-              </a:rPr>
-              <a:t> </a:t>
-            </a:r>
-            <a:r>
-              <a:rPr sz="1200" b="0" i="1" dirty="0" err="1">
-                <a:solidFill>
-                  <a:srgbClr val="595959"/>
-                </a:solidFill>
-                <a:latin typeface="맑은 고딕"/>
-              </a:rPr>
-              <a:t>지배구조</a:t>
-            </a:r>
-            <a:r>
-              <a:rPr sz="1200" b="0" i="1" dirty="0">
-                <a:solidFill>
-                  <a:srgbClr val="595959"/>
-                </a:solidFill>
-                <a:latin typeface="맑은 고딕"/>
-              </a:rPr>
-              <a:t> </a:t>
-            </a:r>
-            <a:r>
-              <a:rPr sz="1200" b="0" i="1" dirty="0" err="1">
-                <a:solidFill>
-                  <a:srgbClr val="595959"/>
-                </a:solidFill>
-                <a:latin typeface="맑은 고딕"/>
-              </a:rPr>
-              <a:t>프리미엄으로</a:t>
-            </a:r>
-            <a:r>
-              <a:rPr sz="1200" b="0" i="1" dirty="0">
-                <a:solidFill>
-                  <a:srgbClr val="595959"/>
-                </a:solidFill>
-                <a:latin typeface="맑은 고딕"/>
-              </a:rPr>
-              <a:t> </a:t>
-            </a:r>
-            <a:r>
-              <a:rPr sz="1200" b="0" i="1" dirty="0" err="1">
-                <a:solidFill>
-                  <a:srgbClr val="595959"/>
-                </a:solidFill>
-                <a:latin typeface="맑은 고딕"/>
-              </a:rPr>
-              <a:t>단정할</a:t>
-            </a:r>
-            <a:r>
-              <a:rPr sz="1200" b="0" i="1" dirty="0">
-                <a:solidFill>
-                  <a:srgbClr val="595959"/>
-                </a:solidFill>
-                <a:latin typeface="맑은 고딕"/>
-              </a:rPr>
-              <a:t> </a:t>
-            </a:r>
-            <a:r>
-              <a:rPr sz="1200" b="0" i="1" dirty="0" err="1">
-                <a:solidFill>
-                  <a:srgbClr val="595959"/>
-                </a:solidFill>
-                <a:latin typeface="맑은 고딕"/>
-              </a:rPr>
-              <a:t>수</a:t>
-            </a:r>
-            <a:r>
-              <a:rPr sz="1200" b="0" i="1" dirty="0">
-                <a:solidFill>
-                  <a:srgbClr val="595959"/>
-                </a:solidFill>
-                <a:latin typeface="맑은 고딕"/>
-              </a:rPr>
-              <a:t> </a:t>
-            </a:r>
-            <a:r>
-              <a:rPr sz="1200" b="0" i="1" dirty="0" err="1">
-                <a:solidFill>
-                  <a:srgbClr val="595959"/>
-                </a:solidFill>
-                <a:latin typeface="맑은 고딕"/>
-              </a:rPr>
-              <a:t>없음</a:t>
-            </a:r>
-            <a:r>
-              <a:rPr sz="1200" b="0" i="1" dirty="0">
-                <a:solidFill>
-                  <a:srgbClr val="595959"/>
                 </a:solidFill>
                 <a:latin typeface="맑은 고딕"/>
               </a:rPr>
@@ -15791,4 +17655,319 @@
   </a:objectDefaults>
   <a:extraClrSchemeLst/>
 </a:theme>
+</file>
+
+<file path=ppt/theme/theme2.xml><?xml version="1.0" encoding="utf-8"?>
+<a:theme xmlns:a="http://schemas.openxmlformats.org/drawingml/2006/main" name="Office Theme">
+  <a:themeElements>
+    <a:clrScheme name="Office">
+      <a:dk1>
+        <a:sysClr val="windowText" lastClr="000000"/>
+      </a:dk1>
+      <a:lt1>
+        <a:sysClr val="window" lastClr="FFFFFF"/>
+      </a:lt1>
+      <a:dk2>
+        <a:srgbClr val="0E2841"/>
+      </a:dk2>
+      <a:lt2>
+        <a:srgbClr val="E8E8E8"/>
+      </a:lt2>
+      <a:accent1>
+        <a:srgbClr val="156082"/>
+      </a:accent1>
+      <a:accent2>
+        <a:srgbClr val="E97132"/>
+      </a:accent2>
+      <a:accent3>
+        <a:srgbClr val="196B24"/>
+      </a:accent3>
+      <a:accent4>
+        <a:srgbClr val="0F9ED5"/>
+      </a:accent4>
+      <a:accent5>
+        <a:srgbClr val="A02B93"/>
+      </a:accent5>
+      <a:accent6>
+        <a:srgbClr val="4EA72E"/>
+      </a:accent6>
+      <a:hlink>
+        <a:srgbClr val="467886"/>
+      </a:hlink>
+      <a:folHlink>
+        <a:srgbClr val="96607D"/>
+      </a:folHlink>
+    </a:clrScheme>
+    <a:fontScheme name="Office">
+      <a:majorFont>
+        <a:latin typeface="Aptos Display" panose="02110004020202020204"/>
+        <a:ea typeface=""/>
+        <a:cs typeface=""/>
+        <a:font script="Jpan" typeface="游ゴシック Light"/>
+        <a:font script="Hang" typeface="맑은 고딕"/>
+        <a:font script="Hans" typeface="等线 Light"/>
+        <a:font script="Hant" typeface="新細明體"/>
+        <a:font script="Arab" typeface="Times New Roman"/>
+        <a:font script="Hebr" typeface="Times New Roman"/>
+        <a:font script="Thai" typeface="Angsana New"/>
+        <a:font script="Ethi" typeface="Nyala"/>
+        <a:font script="Beng" typeface="Vrinda"/>
+        <a:font script="Gujr" typeface="Shruti"/>
+        <a:font script="Khmr" typeface="MoolBoran"/>
+        <a:font script="Knda" typeface="Tunga"/>
+        <a:font script="Guru" typeface="Raavi"/>
+        <a:font script="Cans" typeface="Euphemia"/>
+        <a:font script="Cher" typeface="Plantagenet Cherokee"/>
+        <a:font script="Yiii" typeface="Microsoft Yi Baiti"/>
+        <a:font script="Tibt" typeface="Microsoft Himalaya"/>
+        <a:font script="Thaa" typeface="MV Boli"/>
+        <a:font script="Deva" typeface="Mangal"/>
+        <a:font script="Telu" typeface="Gautami"/>
+        <a:font script="Taml" typeface="Latha"/>
+        <a:font script="Syrc" typeface="Estrangelo Edessa"/>
+        <a:font script="Orya" typeface="Kalinga"/>
+        <a:font script="Mlym" typeface="Kartika"/>
+        <a:font script="Laoo" typeface="DokChampa"/>
+        <a:font script="Sinh" typeface="Iskoola Pota"/>
+        <a:font script="Mong" typeface="Mongolian Baiti"/>
+        <a:font script="Viet" typeface="Times New Roman"/>
+        <a:font script="Uigh" typeface="Microsoft Uighur"/>
+        <a:font script="Geor" typeface="Sylfaen"/>
+        <a:font script="Armn" typeface="Arial"/>
+        <a:font script="Bugi" typeface="Leelawadee UI"/>
+        <a:font script="Bopo" typeface="Microsoft JhengHei"/>
+        <a:font script="Java" typeface="Javanese Text"/>
+        <a:font script="Lisu" typeface="Segoe UI"/>
+        <a:font script="Mymr" typeface="Myanmar Text"/>
+        <a:font script="Nkoo" typeface="Ebrima"/>
+        <a:font script="Olck" typeface="Nirmala UI"/>
+        <a:font script="Osma" typeface="Ebrima"/>
+        <a:font script="Phag" typeface="Phagspa"/>
+        <a:font script="Syrn" typeface="Estrangelo Edessa"/>
+        <a:font script="Syrj" typeface="Estrangelo Edessa"/>
+        <a:font script="Syre" typeface="Estrangelo Edessa"/>
+        <a:font script="Sora" typeface="Nirmala UI"/>
+        <a:font script="Tale" typeface="Microsoft Tai Le"/>
+        <a:font script="Talu" typeface="Microsoft New Tai Lue"/>
+        <a:font script="Tfng" typeface="Ebrima"/>
+      </a:majorFont>
+      <a:minorFont>
+        <a:latin typeface="Aptos" panose="02110004020202020204"/>
+        <a:ea typeface=""/>
+        <a:cs typeface=""/>
+        <a:font script="Jpan" typeface="游ゴシック"/>
+        <a:font script="Hang" typeface="맑은 고딕"/>
+        <a:font script="Hans" typeface="等线"/>
+        <a:font script="Hant" typeface="新細明體"/>
+        <a:font script="Arab" typeface="Arial"/>
+        <a:font script="Hebr" typeface="Arial"/>
+        <a:font script="Thai" typeface="Cordia New"/>
+        <a:font script="Ethi" typeface="Nyala"/>
+        <a:font script="Beng" typeface="Vrinda"/>
+        <a:font script="Gujr" typeface="Shruti"/>
+        <a:font script="Khmr" typeface="DaunPenh"/>
+        <a:font script="Knda" typeface="Tunga"/>
+        <a:font script="Guru" typeface="Raavi"/>
+        <a:font script="Cans" typeface="Euphemia"/>
+        <a:font script="Cher" typeface="Plantagenet Cherokee"/>
+        <a:font script="Yiii" typeface="Microsoft Yi Baiti"/>
+        <a:font script="Tibt" typeface="Microsoft Himalaya"/>
+        <a:font script="Thaa" typeface="MV Boli"/>
+        <a:font script="Deva" typeface="Mangal"/>
+        <a:font script="Telu" typeface="Gautami"/>
+        <a:font script="Taml" typeface="Latha"/>
+        <a:font script="Syrc" typeface="Estrangelo Edessa"/>
+        <a:font script="Orya" typeface="Kalinga"/>
+        <a:font script="Mlym" typeface="Kartika"/>
+        <a:font script="Laoo" typeface="DokChampa"/>
+        <a:font script="Sinh" typeface="Iskoola Pota"/>
+        <a:font script="Mong" typeface="Mongolian Baiti"/>
+        <a:font script="Viet" typeface="Arial"/>
+        <a:font script="Uigh" typeface="Microsoft Uighur"/>
+        <a:font script="Geor" typeface="Sylfaen"/>
+        <a:font script="Armn" typeface="Arial"/>
+        <a:font script="Bugi" typeface="Leelawadee UI"/>
+        <a:font script="Bopo" typeface="Microsoft JhengHei"/>
+        <a:font script="Java" typeface="Javanese Text"/>
+        <a:font script="Lisu" typeface="Segoe UI"/>
+        <a:font script="Mymr" typeface="Myanmar Text"/>
+        <a:font script="Nkoo" typeface="Ebrima"/>
+        <a:font script="Olck" typeface="Nirmala UI"/>
+        <a:font script="Osma" typeface="Ebrima"/>
+        <a:font script="Phag" typeface="Phagspa"/>
+        <a:font script="Syrn" typeface="Estrangelo Edessa"/>
+        <a:font script="Syrj" typeface="Estrangelo Edessa"/>
+        <a:font script="Syre" typeface="Estrangelo Edessa"/>
+        <a:font script="Sora" typeface="Nirmala UI"/>
+        <a:font script="Tale" typeface="Microsoft Tai Le"/>
+        <a:font script="Talu" typeface="Microsoft New Tai Lue"/>
+        <a:font script="Tfng" typeface="Ebrima"/>
+      </a:minorFont>
+    </a:fontScheme>
+    <a:fmtScheme name="Office">
+      <a:fillStyleLst>
+        <a:solidFill>
+          <a:schemeClr val="phClr"/>
+        </a:solidFill>
+        <a:gradFill rotWithShape="1">
+          <a:gsLst>
+            <a:gs pos="0">
+              <a:schemeClr val="phClr">
+                <a:lumMod val="110000"/>
+                <a:satMod val="105000"/>
+                <a:tint val="67000"/>
+              </a:schemeClr>
+            </a:gs>
+            <a:gs pos="50000">
+              <a:schemeClr val="phClr">
+                <a:lumMod val="105000"/>
+                <a:satMod val="103000"/>
+                <a:tint val="73000"/>
+              </a:schemeClr>
+            </a:gs>
+            <a:gs pos="100000">
+              <a:schemeClr val="phClr">
+                <a:lumMod val="105000"/>
+                <a:satMod val="109000"/>
+                <a:tint val="81000"/>
+              </a:schemeClr>
+            </a:gs>
+          </a:gsLst>
+          <a:lin ang="5400000" scaled="0"/>
+        </a:gradFill>
+        <a:gradFill rotWithShape="1">
+          <a:gsLst>
+            <a:gs pos="0">
+              <a:schemeClr val="phClr">
+                <a:satMod val="103000"/>
+                <a:lumMod val="102000"/>
+                <a:tint val="94000"/>
+              </a:schemeClr>
+            </a:gs>
+            <a:gs pos="50000">
+              <a:schemeClr val="phClr">
+                <a:satMod val="110000"/>
+                <a:lumMod val="100000"/>
+                <a:shade val="100000"/>
+              </a:schemeClr>
+            </a:gs>
+            <a:gs pos="100000">
+              <a:schemeClr val="phClr">
+                <a:lumMod val="99000"/>
+                <a:satMod val="120000"/>
+                <a:shade val="78000"/>
+              </a:schemeClr>
+            </a:gs>
+          </a:gsLst>
+          <a:lin ang="5400000" scaled="0"/>
+        </a:gradFill>
+      </a:fillStyleLst>
+      <a:lnStyleLst>
+        <a:ln w="12700" cap="flat" cmpd="sng" algn="ctr">
+          <a:solidFill>
+            <a:schemeClr val="phClr"/>
+          </a:solidFill>
+          <a:prstDash val="solid"/>
+          <a:miter lim="800000"/>
+        </a:ln>
+        <a:ln w="19050" cap="flat" cmpd="sng" algn="ctr">
+          <a:solidFill>
+            <a:schemeClr val="phClr"/>
+          </a:solidFill>
+          <a:prstDash val="solid"/>
+          <a:miter lim="800000"/>
+        </a:ln>
+        <a:ln w="25400" cap="flat" cmpd="sng" algn="ctr">
+          <a:solidFill>
+            <a:schemeClr val="phClr"/>
+          </a:solidFill>
+          <a:prstDash val="solid"/>
+          <a:miter lim="800000"/>
+        </a:ln>
+      </a:lnStyleLst>
+      <a:effectStyleLst>
+        <a:effectStyle>
+          <a:effectLst/>
+        </a:effectStyle>
+        <a:effectStyle>
+          <a:effectLst/>
+        </a:effectStyle>
+        <a:effectStyle>
+          <a:effectLst>
+            <a:outerShdw blurRad="57150" dist="19050" dir="5400000" algn="ctr" rotWithShape="0">
+              <a:srgbClr val="000000">
+                <a:alpha val="63000"/>
+              </a:srgbClr>
+            </a:outerShdw>
+          </a:effectLst>
+        </a:effectStyle>
+      </a:effectStyleLst>
+      <a:bgFillStyleLst>
+        <a:solidFill>
+          <a:schemeClr val="phClr"/>
+        </a:solidFill>
+        <a:solidFill>
+          <a:schemeClr val="phClr">
+            <a:tint val="95000"/>
+            <a:satMod val="170000"/>
+          </a:schemeClr>
+        </a:solidFill>
+        <a:gradFill rotWithShape="1">
+          <a:gsLst>
+            <a:gs pos="0">
+              <a:schemeClr val="phClr">
+                <a:tint val="93000"/>
+                <a:satMod val="150000"/>
+                <a:shade val="98000"/>
+                <a:lumMod val="102000"/>
+              </a:schemeClr>
+            </a:gs>
+            <a:gs pos="50000">
+              <a:schemeClr val="phClr">
+                <a:tint val="98000"/>
+                <a:satMod val="130000"/>
+                <a:shade val="90000"/>
+                <a:lumMod val="103000"/>
+              </a:schemeClr>
+            </a:gs>
+            <a:gs pos="100000">
+              <a:schemeClr val="phClr">
+                <a:shade val="63000"/>
+                <a:satMod val="120000"/>
+              </a:schemeClr>
+            </a:gs>
+          </a:gsLst>
+          <a:lin ang="5400000" scaled="0"/>
+        </a:gradFill>
+      </a:bgFillStyleLst>
+    </a:fmtScheme>
+  </a:themeElements>
+  <a:objectDefaults>
+    <a:lnDef>
+      <a:spPr/>
+      <a:bodyPr/>
+      <a:lstStyle/>
+      <a:style>
+        <a:lnRef idx="2">
+          <a:schemeClr val="accent1"/>
+        </a:lnRef>
+        <a:fillRef idx="0">
+          <a:schemeClr val="accent1"/>
+        </a:fillRef>
+        <a:effectRef idx="1">
+          <a:schemeClr val="accent1"/>
+        </a:effectRef>
+        <a:fontRef idx="minor">
+          <a:schemeClr val="tx1"/>
+        </a:fontRef>
+      </a:style>
+    </a:lnDef>
+  </a:objectDefaults>
+  <a:extraClrSchemeLst/>
+  <a:extLst>
+    <a:ext uri="{05A4C25C-085E-4340-85A3-A5531E510DB2}">
+      <thm15:themeFamily xmlns:thm15="http://schemas.microsoft.com/office/thememl/2012/main" name="Office Theme" id="{2E142A2C-CD16-42D6-873A-C26D2A0506FA}" vid="{1BDDFF52-6CD6-40A5-AB3C-68EB2F1E4D0A}"/>
+    </a:ext>
+  </a:extLst>
+</a:theme>
 </file>